--- a/pptx/LAYOUTS.pptx
+++ b/pptx/LAYOUTS.pptx
@@ -292,7 +292,7 @@
           <a:p>
             <a:fld id="{56B1467F-6B65-409C-AA12-1D00F0EE132E}" type="datetimeFigureOut">
               <a:rPr lang="en-US" smtClean="0"/>
-              <a:t>7/10/2026</a:t>
+              <a:t>7/18/2026</a:t>
             </a:fld>
             <a:endParaRPr lang="en-US"/>
           </a:p>
@@ -490,7 +490,7 @@
           <a:p>
             <a:fld id="{56B1467F-6B65-409C-AA12-1D00F0EE132E}" type="datetimeFigureOut">
               <a:rPr lang="en-US" smtClean="0"/>
-              <a:t>7/10/2026</a:t>
+              <a:t>7/18/2026</a:t>
             </a:fld>
             <a:endParaRPr lang="en-US"/>
           </a:p>
@@ -698,7 +698,7 @@
           <a:p>
             <a:fld id="{56B1467F-6B65-409C-AA12-1D00F0EE132E}" type="datetimeFigureOut">
               <a:rPr lang="en-US" smtClean="0"/>
-              <a:t>7/10/2026</a:t>
+              <a:t>7/18/2026</a:t>
             </a:fld>
             <a:endParaRPr lang="en-US"/>
           </a:p>
@@ -900,7 +900,7 @@
           <a:p>
             <a:fld id="{B072510F-8C52-483F-A0B7-B48FA3B75220}" type="datetimeFigureOut">
               <a:rPr lang="en-US" smtClean="0"/>
-              <a:t>7/10/2026</a:t>
+              <a:t>7/18/2026</a:t>
             </a:fld>
             <a:endParaRPr lang="en-US"/>
           </a:p>
@@ -1068,7 +1068,7 @@
           <a:p>
             <a:fld id="{B072510F-8C52-483F-A0B7-B48FA3B75220}" type="datetimeFigureOut">
               <a:rPr lang="en-US" smtClean="0"/>
-              <a:t>7/10/2026</a:t>
+              <a:t>7/18/2026</a:t>
             </a:fld>
             <a:endParaRPr lang="en-US"/>
           </a:p>
@@ -1313,7 +1313,7 @@
           <a:p>
             <a:fld id="{B072510F-8C52-483F-A0B7-B48FA3B75220}" type="datetimeFigureOut">
               <a:rPr lang="en-US" smtClean="0"/>
-              <a:t>7/10/2026</a:t>
+              <a:t>7/18/2026</a:t>
             </a:fld>
             <a:endParaRPr lang="en-US"/>
           </a:p>
@@ -1542,7 +1542,7 @@
           <a:p>
             <a:fld id="{B072510F-8C52-483F-A0B7-B48FA3B75220}" type="datetimeFigureOut">
               <a:rPr lang="en-US" smtClean="0"/>
-              <a:t>7/10/2026</a:t>
+              <a:t>7/18/2026</a:t>
             </a:fld>
             <a:endParaRPr lang="en-US"/>
           </a:p>
@@ -1906,7 +1906,7 @@
           <a:p>
             <a:fld id="{B072510F-8C52-483F-A0B7-B48FA3B75220}" type="datetimeFigureOut">
               <a:rPr lang="en-US" smtClean="0"/>
-              <a:t>7/10/2026</a:t>
+              <a:t>7/18/2026</a:t>
             </a:fld>
             <a:endParaRPr lang="en-US"/>
           </a:p>
@@ -2023,7 +2023,7 @@
           <a:p>
             <a:fld id="{B072510F-8C52-483F-A0B7-B48FA3B75220}" type="datetimeFigureOut">
               <a:rPr lang="en-US" smtClean="0"/>
-              <a:t>7/10/2026</a:t>
+              <a:t>7/18/2026</a:t>
             </a:fld>
             <a:endParaRPr lang="en-US"/>
           </a:p>
@@ -2118,7 +2118,7 @@
           <a:p>
             <a:fld id="{B072510F-8C52-483F-A0B7-B48FA3B75220}" type="datetimeFigureOut">
               <a:rPr lang="en-US" smtClean="0"/>
-              <a:t>7/10/2026</a:t>
+              <a:t>7/18/2026</a:t>
             </a:fld>
             <a:endParaRPr lang="en-US"/>
           </a:p>
@@ -2393,7 +2393,7 @@
           <a:p>
             <a:fld id="{B072510F-8C52-483F-A0B7-B48FA3B75220}" type="datetimeFigureOut">
               <a:rPr lang="en-US" smtClean="0"/>
-              <a:t>7/10/2026</a:t>
+              <a:t>7/18/2026</a:t>
             </a:fld>
             <a:endParaRPr lang="en-US"/>
           </a:p>
@@ -2579,7 +2579,7 @@
           <a:p>
             <a:fld id="{56B1467F-6B65-409C-AA12-1D00F0EE132E}" type="datetimeFigureOut">
               <a:rPr lang="en-US" smtClean="0"/>
-              <a:t>7/10/2026</a:t>
+              <a:t>7/18/2026</a:t>
             </a:fld>
             <a:endParaRPr lang="en-US"/>
           </a:p>
@@ -2843,7 +2843,7 @@
           <a:p>
             <a:fld id="{B072510F-8C52-483F-A0B7-B48FA3B75220}" type="datetimeFigureOut">
               <a:rPr lang="en-US" smtClean="0"/>
-              <a:t>7/10/2026</a:t>
+              <a:t>7/18/2026</a:t>
             </a:fld>
             <a:endParaRPr lang="en-US"/>
           </a:p>
@@ -3011,7 +3011,7 @@
           <a:p>
             <a:fld id="{B072510F-8C52-483F-A0B7-B48FA3B75220}" type="datetimeFigureOut">
               <a:rPr lang="en-US" smtClean="0"/>
-              <a:t>7/10/2026</a:t>
+              <a:t>7/18/2026</a:t>
             </a:fld>
             <a:endParaRPr lang="en-US"/>
           </a:p>
@@ -3189,7 +3189,7 @@
           <a:p>
             <a:fld id="{B072510F-8C52-483F-A0B7-B48FA3B75220}" type="datetimeFigureOut">
               <a:rPr lang="en-US" smtClean="0"/>
-              <a:t>7/10/2026</a:t>
+              <a:t>7/18/2026</a:t>
             </a:fld>
             <a:endParaRPr lang="en-US"/>
           </a:p>
@@ -3452,7 +3452,7 @@
           <a:p>
             <a:fld id="{56B1467F-6B65-409C-AA12-1D00F0EE132E}" type="datetimeFigureOut">
               <a:rPr lang="en-US" smtClean="0"/>
-              <a:t>7/10/2026</a:t>
+              <a:t>7/18/2026</a:t>
             </a:fld>
             <a:endParaRPr lang="en-US"/>
           </a:p>
@@ -3717,7 +3717,7 @@
           <a:p>
             <a:fld id="{56B1467F-6B65-409C-AA12-1D00F0EE132E}" type="datetimeFigureOut">
               <a:rPr lang="en-US" smtClean="0"/>
-              <a:t>7/10/2026</a:t>
+              <a:t>7/18/2026</a:t>
             </a:fld>
             <a:endParaRPr lang="en-US"/>
           </a:p>
@@ -4129,7 +4129,7 @@
           <a:p>
             <a:fld id="{56B1467F-6B65-409C-AA12-1D00F0EE132E}" type="datetimeFigureOut">
               <a:rPr lang="en-US" smtClean="0"/>
-              <a:t>7/10/2026</a:t>
+              <a:t>7/18/2026</a:t>
             </a:fld>
             <a:endParaRPr lang="en-US"/>
           </a:p>
@@ -4270,7 +4270,7 @@
           <a:p>
             <a:fld id="{56B1467F-6B65-409C-AA12-1D00F0EE132E}" type="datetimeFigureOut">
               <a:rPr lang="en-US" smtClean="0"/>
-              <a:t>7/10/2026</a:t>
+              <a:t>7/18/2026</a:t>
             </a:fld>
             <a:endParaRPr lang="en-US"/>
           </a:p>
@@ -4383,7 +4383,7 @@
           <a:p>
             <a:fld id="{56B1467F-6B65-409C-AA12-1D00F0EE132E}" type="datetimeFigureOut">
               <a:rPr lang="en-US" smtClean="0"/>
-              <a:t>7/10/2026</a:t>
+              <a:t>7/18/2026</a:t>
             </a:fld>
             <a:endParaRPr lang="en-US"/>
           </a:p>
@@ -4694,7 +4694,7 @@
           <a:p>
             <a:fld id="{56B1467F-6B65-409C-AA12-1D00F0EE132E}" type="datetimeFigureOut">
               <a:rPr lang="en-US" smtClean="0"/>
-              <a:t>7/10/2026</a:t>
+              <a:t>7/18/2026</a:t>
             </a:fld>
             <a:endParaRPr lang="en-US"/>
           </a:p>
@@ -4982,7 +4982,7 @@
           <a:p>
             <a:fld id="{56B1467F-6B65-409C-AA12-1D00F0EE132E}" type="datetimeFigureOut">
               <a:rPr lang="en-US" smtClean="0"/>
-              <a:t>7/10/2026</a:t>
+              <a:t>7/18/2026</a:t>
             </a:fld>
             <a:endParaRPr lang="en-US"/>
           </a:p>
@@ -5223,7 +5223,7 @@
           <a:p>
             <a:fld id="{56B1467F-6B65-409C-AA12-1D00F0EE132E}" type="datetimeFigureOut">
               <a:rPr lang="en-US" smtClean="0"/>
-              <a:t>7/10/2026</a:t>
+              <a:t>7/18/2026</a:t>
             </a:fld>
             <a:endParaRPr lang="en-US"/>
           </a:p>
@@ -5773,7 +5773,7 @@
           <a:p>
             <a:fld id="{B072510F-8C52-483F-A0B7-B48FA3B75220}" type="datetimeFigureOut">
               <a:rPr lang="en-US" smtClean="0"/>
-              <a:t>7/10/2026</a:t>
+              <a:t>7/18/2026</a:t>
             </a:fld>
             <a:endParaRPr lang="en-US"/>
           </a:p>
@@ -6337,10 +6337,10 @@
       </p:grpSpPr>
       <p:grpSp>
         <p:nvGrpSpPr>
-          <p:cNvPr id="2" name="Group 1">
-            <a:extLst>
-              <a:ext uri="{FF2B5EF4-FFF2-40B4-BE49-F238E27FC236}">
-                <a16:creationId xmlns:a16="http://schemas.microsoft.com/office/drawing/2014/main" id="{E34D0422-DA05-9C2F-A079-1B428946C482}"/>
+          <p:cNvPr id="4" name="Group 3">
+            <a:extLst>
+              <a:ext uri="{FF2B5EF4-FFF2-40B4-BE49-F238E27FC236}">
+                <a16:creationId xmlns:a16="http://schemas.microsoft.com/office/drawing/2014/main" id="{6F749380-3FF2-C404-D5CB-E3BFF767B67A}"/>
               </a:ext>
             </a:extLst>
           </p:cNvPr>
@@ -6350,1436 +6350,1457 @@
         <p:grpSpPr>
           <a:xfrm>
             <a:off x="511821" y="126908"/>
-            <a:ext cx="5787380" cy="6466522"/>
+            <a:ext cx="6022587" cy="6551698"/>
             <a:chOff x="511821" y="126908"/>
-            <a:chExt cx="5787380" cy="6466522"/>
+            <a:chExt cx="6022587" cy="6551698"/>
           </a:xfrm>
         </p:grpSpPr>
-        <p:pic>
-          <p:nvPicPr>
-            <p:cNvPr id="6" name="Picture 5">
+        <p:grpSp>
+          <p:nvGrpSpPr>
+            <p:cNvPr id="2" name="Group 1">
               <a:extLst>
                 <a:ext uri="{FF2B5EF4-FFF2-40B4-BE49-F238E27FC236}">
-                  <a16:creationId xmlns:a16="http://schemas.microsoft.com/office/drawing/2014/main" id="{17612050-2E64-2DA6-F2D0-23D2CDB48F67}"/>
+                  <a16:creationId xmlns:a16="http://schemas.microsoft.com/office/drawing/2014/main" id="{E34D0422-DA05-9C2F-A079-1B428946C482}"/>
                 </a:ext>
               </a:extLst>
             </p:cNvPr>
-            <p:cNvPicPr>
-              <a:picLocks noChangeAspect="1"/>
-            </p:cNvPicPr>
+            <p:cNvGrpSpPr/>
             <p:nvPr/>
-          </p:nvPicPr>
-          <p:blipFill>
-            <a:blip r:embed="rId2"/>
-            <a:stretch>
-              <a:fillRect/>
-            </a:stretch>
-          </p:blipFill>
+          </p:nvGrpSpPr>
+          <p:grpSpPr>
+            <a:xfrm>
+              <a:off x="511821" y="126908"/>
+              <a:ext cx="5787380" cy="6466522"/>
+              <a:chOff x="511821" y="126908"/>
+              <a:chExt cx="5787380" cy="6466522"/>
+            </a:xfrm>
+          </p:grpSpPr>
+          <p:pic>
+            <p:nvPicPr>
+              <p:cNvPr id="6" name="Picture 5">
+                <a:extLst>
+                  <a:ext uri="{FF2B5EF4-FFF2-40B4-BE49-F238E27FC236}">
+                    <a16:creationId xmlns:a16="http://schemas.microsoft.com/office/drawing/2014/main" id="{17612050-2E64-2DA6-F2D0-23D2CDB48F67}"/>
+                  </a:ext>
+                </a:extLst>
+              </p:cNvPr>
+              <p:cNvPicPr>
+                <a:picLocks noChangeAspect="1"/>
+              </p:cNvPicPr>
+              <p:nvPr/>
+            </p:nvPicPr>
+            <p:blipFill>
+              <a:blip r:embed="rId2"/>
+              <a:stretch>
+                <a:fillRect/>
+              </a:stretch>
+            </p:blipFill>
+            <p:spPr>
+              <a:xfrm>
+                <a:off x="879139" y="200536"/>
+                <a:ext cx="5420062" cy="6392894"/>
+              </a:xfrm>
+              <a:prstGeom prst="rect">
+                <a:avLst/>
+              </a:prstGeom>
+            </p:spPr>
+          </p:pic>
+          <p:pic>
+            <p:nvPicPr>
+              <p:cNvPr id="10" name="Picture 9">
+                <a:extLst>
+                  <a:ext uri="{FF2B5EF4-FFF2-40B4-BE49-F238E27FC236}">
+                    <a16:creationId xmlns:a16="http://schemas.microsoft.com/office/drawing/2014/main" id="{491FAC44-A862-2A9E-B277-02FE4AEDBA16}"/>
+                  </a:ext>
+                </a:extLst>
+              </p:cNvPr>
+              <p:cNvPicPr>
+                <a:picLocks noChangeAspect="1"/>
+              </p:cNvPicPr>
+              <p:nvPr/>
+            </p:nvPicPr>
+            <p:blipFill rotWithShape="1">
+              <a:blip r:embed="rId3"/>
+              <a:srcRect b="88122"/>
+              <a:stretch/>
+            </p:blipFill>
+            <p:spPr>
+              <a:xfrm>
+                <a:off x="511821" y="126908"/>
+                <a:ext cx="5420062" cy="504276"/>
+              </a:xfrm>
+              <a:prstGeom prst="rect">
+                <a:avLst/>
+              </a:prstGeom>
+            </p:spPr>
+          </p:pic>
+        </p:grpSp>
+        <p:sp>
+          <p:nvSpPr>
+            <p:cNvPr id="3" name="Rectangle 2">
+              <a:extLst>
+                <a:ext uri="{FF2B5EF4-FFF2-40B4-BE49-F238E27FC236}">
+                  <a16:creationId xmlns:a16="http://schemas.microsoft.com/office/drawing/2014/main" id="{BC0CBE7C-A708-BC55-FF9E-D5E6773973CE}"/>
+                </a:ext>
+              </a:extLst>
+            </p:cNvPr>
+            <p:cNvSpPr/>
+            <p:nvPr/>
+          </p:nvSpPr>
           <p:spPr>
             <a:xfrm>
-              <a:off x="879139" y="200536"/>
-              <a:ext cx="5420062" cy="6392894"/>
+              <a:off x="879139" y="179394"/>
+              <a:ext cx="5655269" cy="399303"/>
             </a:xfrm>
             <a:prstGeom prst="rect">
               <a:avLst/>
             </a:prstGeom>
+            <a:noFill/>
+            <a:ln w="22225">
+              <a:solidFill>
+                <a:schemeClr val="accent4">
+                  <a:lumMod val="75000"/>
+                </a:schemeClr>
+              </a:solidFill>
+              <a:prstDash val="dash"/>
+            </a:ln>
           </p:spPr>
-        </p:pic>
-        <p:pic>
-          <p:nvPicPr>
-            <p:cNvPr id="10" name="Picture 9">
+          <p:style>
+            <a:lnRef idx="2">
+              <a:schemeClr val="accent1">
+                <a:shade val="50000"/>
+              </a:schemeClr>
+            </a:lnRef>
+            <a:fillRef idx="1">
+              <a:schemeClr val="accent1"/>
+            </a:fillRef>
+            <a:effectRef idx="0">
+              <a:schemeClr val="accent1"/>
+            </a:effectRef>
+            <a:fontRef idx="minor">
+              <a:schemeClr val="lt1"/>
+            </a:fontRef>
+          </p:style>
+          <p:txBody>
+            <a:bodyPr rtlCol="0" anchor="ctr"/>
+            <a:lstStyle/>
+            <a:p>
+              <a:pPr marL="0" marR="0" lvl="0" indent="0" algn="ctr" defTabSz="914400" rtl="0" eaLnBrk="1" fontAlgn="auto" latinLnBrk="0" hangingPunct="1">
+                <a:lnSpc>
+                  <a:spcPct val="100000"/>
+                </a:lnSpc>
+                <a:spcBef>
+                  <a:spcPts val="0"/>
+                </a:spcBef>
+                <a:spcAft>
+                  <a:spcPts val="0"/>
+                </a:spcAft>
+                <a:buClrTx/>
+                <a:buSzTx/>
+                <a:buFontTx/>
+                <a:buNone/>
+                <a:tabLst/>
+                <a:defRPr/>
+              </a:pPr>
+              <a:endParaRPr kumimoji="0" lang="en-US" sz="1800" b="0" i="0" u="none" strike="noStrike" kern="1200" cap="none" spc="0" normalizeH="0" baseline="0" noProof="0">
+                <a:ln>
+                  <a:noFill/>
+                </a:ln>
+                <a:solidFill>
+                  <a:prstClr val="white"/>
+                </a:solidFill>
+                <a:effectLst/>
+                <a:uLnTx/>
+                <a:uFillTx/>
+                <a:latin typeface="Calibri" panose="020F0502020204030204"/>
+                <a:ea typeface="+mn-ea"/>
+                <a:cs typeface="+mn-cs"/>
+              </a:endParaRPr>
+            </a:p>
+          </p:txBody>
+        </p:sp>
+        <p:sp>
+          <p:nvSpPr>
+            <p:cNvPr id="5" name="TextBox 4">
               <a:extLst>
                 <a:ext uri="{FF2B5EF4-FFF2-40B4-BE49-F238E27FC236}">
-                  <a16:creationId xmlns:a16="http://schemas.microsoft.com/office/drawing/2014/main" id="{491FAC44-A862-2A9E-B277-02FE4AEDBA16}"/>
+                  <a16:creationId xmlns:a16="http://schemas.microsoft.com/office/drawing/2014/main" id="{8E6CDF7B-2DE9-74E8-B215-EA247F1BA481}"/>
                 </a:ext>
               </a:extLst>
             </p:cNvPr>
-            <p:cNvPicPr>
-              <a:picLocks noChangeAspect="1"/>
-            </p:cNvPicPr>
+            <p:cNvSpPr txBox="1"/>
             <p:nvPr/>
-          </p:nvPicPr>
-          <p:blipFill rotWithShape="1">
-            <a:blip r:embed="rId3"/>
-            <a:srcRect b="88122"/>
-            <a:stretch/>
-          </p:blipFill>
+          </p:nvSpPr>
           <p:spPr>
             <a:xfrm>
-              <a:off x="511821" y="126908"/>
-              <a:ext cx="5420062" cy="504276"/>
+              <a:off x="5751330" y="215215"/>
+              <a:ext cx="728425" cy="369332"/>
             </a:xfrm>
             <a:prstGeom prst="rect">
               <a:avLst/>
             </a:prstGeom>
+            <a:noFill/>
           </p:spPr>
-        </p:pic>
-      </p:grpSp>
-      <p:sp>
-        <p:nvSpPr>
-          <p:cNvPr id="3" name="Rectangle 2">
-            <a:extLst>
-              <a:ext uri="{FF2B5EF4-FFF2-40B4-BE49-F238E27FC236}">
-                <a16:creationId xmlns:a16="http://schemas.microsoft.com/office/drawing/2014/main" id="{BC0CBE7C-A708-BC55-FF9E-D5E6773973CE}"/>
-              </a:ext>
-            </a:extLst>
-          </p:cNvPr>
-          <p:cNvSpPr/>
-          <p:nvPr/>
-        </p:nvSpPr>
-        <p:spPr>
-          <a:xfrm>
-            <a:off x="879139" y="179394"/>
-            <a:ext cx="5655269" cy="399303"/>
-          </a:xfrm>
-          <a:prstGeom prst="rect">
-            <a:avLst/>
-          </a:prstGeom>
-          <a:noFill/>
-          <a:ln w="22225">
-            <a:solidFill>
-              <a:schemeClr val="accent4">
-                <a:lumMod val="75000"/>
+          <p:txBody>
+            <a:bodyPr wrap="square" rtlCol="0">
+              <a:spAutoFit/>
+            </a:bodyPr>
+            <a:lstStyle/>
+            <a:p>
+              <a:pPr marL="0" marR="0" lvl="0" indent="0" algn="ctr" defTabSz="914400" rtl="0" eaLnBrk="1" fontAlgn="auto" latinLnBrk="0" hangingPunct="1">
+                <a:lnSpc>
+                  <a:spcPct val="100000"/>
+                </a:lnSpc>
+                <a:spcBef>
+                  <a:spcPts val="0"/>
+                </a:spcBef>
+                <a:spcAft>
+                  <a:spcPts val="0"/>
+                </a:spcAft>
+                <a:buClrTx/>
+                <a:buSzTx/>
+                <a:buFontTx/>
+                <a:buNone/>
+                <a:tabLst/>
+                <a:defRPr/>
+              </a:pPr>
+              <a:r>
+                <a:rPr kumimoji="0" lang="en-US" sz="1800" b="0" i="0" u="none" strike="noStrike" kern="1200" cap="none" spc="0" normalizeH="0" baseline="0" noProof="0" dirty="0">
+                  <a:ln>
+                    <a:noFill/>
+                  </a:ln>
+                  <a:solidFill>
+                    <a:srgbClr val="FFC000">
+                      <a:lumMod val="75000"/>
+                    </a:srgbClr>
+                  </a:solidFill>
+                  <a:effectLst/>
+                  <a:uLnTx/>
+                  <a:uFillTx/>
+                  <a:latin typeface="Arial Black" panose="020B0A04020102020204" pitchFamily="34" charset="0"/>
+                  <a:ea typeface="+mn-ea"/>
+                  <a:cs typeface="Aharoni" panose="02010803020104030203" pitchFamily="2" charset="-79"/>
+                </a:rPr>
+                <a:t>div1</a:t>
+              </a:r>
+            </a:p>
+          </p:txBody>
+        </p:sp>
+        <p:sp>
+          <p:nvSpPr>
+            <p:cNvPr id="11" name="Rectangle 10">
+              <a:extLst>
+                <a:ext uri="{FF2B5EF4-FFF2-40B4-BE49-F238E27FC236}">
+                  <a16:creationId xmlns:a16="http://schemas.microsoft.com/office/drawing/2014/main" id="{CCD204E2-9F76-7384-71C0-7DA8287AF336}"/>
+                </a:ext>
+              </a:extLst>
+            </p:cNvPr>
+            <p:cNvSpPr/>
+            <p:nvPr/>
+          </p:nvSpPr>
+          <p:spPr>
+            <a:xfrm>
+              <a:off x="879139" y="604914"/>
+              <a:ext cx="5655269" cy="399303"/>
+            </a:xfrm>
+            <a:prstGeom prst="rect">
+              <a:avLst/>
+            </a:prstGeom>
+            <a:noFill/>
+            <a:ln w="22225">
+              <a:solidFill>
+                <a:schemeClr val="accent4">
+                  <a:lumMod val="75000"/>
+                </a:schemeClr>
+              </a:solidFill>
+              <a:prstDash val="dash"/>
+            </a:ln>
+          </p:spPr>
+          <p:style>
+            <a:lnRef idx="2">
+              <a:schemeClr val="accent1">
+                <a:shade val="50000"/>
               </a:schemeClr>
-            </a:solidFill>
-            <a:prstDash val="dash"/>
-          </a:ln>
-        </p:spPr>
-        <p:style>
-          <a:lnRef idx="2">
-            <a:schemeClr val="accent1">
-              <a:shade val="50000"/>
-            </a:schemeClr>
-          </a:lnRef>
-          <a:fillRef idx="1">
-            <a:schemeClr val="accent1"/>
-          </a:fillRef>
-          <a:effectRef idx="0">
-            <a:schemeClr val="accent1"/>
-          </a:effectRef>
-          <a:fontRef idx="minor">
-            <a:schemeClr val="lt1"/>
-          </a:fontRef>
-        </p:style>
-        <p:txBody>
-          <a:bodyPr rtlCol="0" anchor="ctr"/>
-          <a:lstStyle/>
-          <a:p>
-            <a:pPr marL="0" marR="0" lvl="0" indent="0" algn="ctr" defTabSz="914400" rtl="0" eaLnBrk="1" fontAlgn="auto" latinLnBrk="0" hangingPunct="1">
-              <a:lnSpc>
-                <a:spcPct val="100000"/>
-              </a:lnSpc>
-              <a:spcBef>
-                <a:spcPts val="0"/>
-              </a:spcBef>
-              <a:spcAft>
-                <a:spcPts val="0"/>
-              </a:spcAft>
-              <a:buClrTx/>
-              <a:buSzTx/>
-              <a:buFontTx/>
-              <a:buNone/>
-              <a:tabLst/>
-              <a:defRPr/>
-            </a:pPr>
-            <a:endParaRPr kumimoji="0" lang="en-US" sz="1800" b="0" i="0" u="none" strike="noStrike" kern="1200" cap="none" spc="0" normalizeH="0" baseline="0" noProof="0">
-              <a:ln>
-                <a:noFill/>
-              </a:ln>
-              <a:solidFill>
-                <a:prstClr val="white"/>
-              </a:solidFill>
-              <a:effectLst/>
-              <a:uLnTx/>
-              <a:uFillTx/>
-              <a:latin typeface="Calibri" panose="020F0502020204030204"/>
-              <a:ea typeface="+mn-ea"/>
-              <a:cs typeface="+mn-cs"/>
-            </a:endParaRPr>
-          </a:p>
-        </p:txBody>
-      </p:sp>
-      <p:sp>
-        <p:nvSpPr>
-          <p:cNvPr id="5" name="TextBox 4">
-            <a:extLst>
-              <a:ext uri="{FF2B5EF4-FFF2-40B4-BE49-F238E27FC236}">
-                <a16:creationId xmlns:a16="http://schemas.microsoft.com/office/drawing/2014/main" id="{8E6CDF7B-2DE9-74E8-B215-EA247F1BA481}"/>
-              </a:ext>
-            </a:extLst>
-          </p:cNvPr>
-          <p:cNvSpPr txBox="1"/>
-          <p:nvPr/>
-        </p:nvSpPr>
-        <p:spPr>
-          <a:xfrm>
-            <a:off x="5751330" y="215215"/>
-            <a:ext cx="728425" cy="369332"/>
-          </a:xfrm>
-          <a:prstGeom prst="rect">
-            <a:avLst/>
-          </a:prstGeom>
-          <a:noFill/>
-        </p:spPr>
-        <p:txBody>
-          <a:bodyPr wrap="square" rtlCol="0">
-            <a:spAutoFit/>
-          </a:bodyPr>
-          <a:lstStyle/>
-          <a:p>
-            <a:pPr marL="0" marR="0" lvl="0" indent="0" algn="ctr" defTabSz="914400" rtl="0" eaLnBrk="1" fontAlgn="auto" latinLnBrk="0" hangingPunct="1">
-              <a:lnSpc>
-                <a:spcPct val="100000"/>
-              </a:lnSpc>
-              <a:spcBef>
-                <a:spcPts val="0"/>
-              </a:spcBef>
-              <a:spcAft>
-                <a:spcPts val="0"/>
-              </a:spcAft>
-              <a:buClrTx/>
-              <a:buSzTx/>
-              <a:buFontTx/>
-              <a:buNone/>
-              <a:tabLst/>
-              <a:defRPr/>
-            </a:pPr>
-            <a:r>
-              <a:rPr kumimoji="0" lang="en-US" sz="1800" b="0" i="0" u="none" strike="noStrike" kern="1200" cap="none" spc="0" normalizeH="0" baseline="0" noProof="0" dirty="0">
+            </a:lnRef>
+            <a:fillRef idx="1">
+              <a:schemeClr val="accent1"/>
+            </a:fillRef>
+            <a:effectRef idx="0">
+              <a:schemeClr val="accent1"/>
+            </a:effectRef>
+            <a:fontRef idx="minor">
+              <a:schemeClr val="lt1"/>
+            </a:fontRef>
+          </p:style>
+          <p:txBody>
+            <a:bodyPr rtlCol="0" anchor="ctr"/>
+            <a:lstStyle/>
+            <a:p>
+              <a:pPr marL="0" marR="0" lvl="0" indent="0" algn="ctr" defTabSz="914400" rtl="0" eaLnBrk="1" fontAlgn="auto" latinLnBrk="0" hangingPunct="1">
+                <a:lnSpc>
+                  <a:spcPct val="100000"/>
+                </a:lnSpc>
+                <a:spcBef>
+                  <a:spcPts val="0"/>
+                </a:spcBef>
+                <a:spcAft>
+                  <a:spcPts val="0"/>
+                </a:spcAft>
+                <a:buClrTx/>
+                <a:buSzTx/>
+                <a:buFontTx/>
+                <a:buNone/>
+                <a:tabLst/>
+                <a:defRPr/>
+              </a:pPr>
+              <a:endParaRPr kumimoji="0" lang="en-US" sz="1800" b="0" i="0" u="none" strike="noStrike" kern="1200" cap="none" spc="0" normalizeH="0" baseline="0" noProof="0">
                 <a:ln>
                   <a:noFill/>
                 </a:ln>
                 <a:solidFill>
-                  <a:srgbClr val="FFC000">
-                    <a:lumMod val="75000"/>
-                  </a:srgbClr>
+                  <a:prstClr val="white"/>
                 </a:solidFill>
                 <a:effectLst/>
                 <a:uLnTx/>
                 <a:uFillTx/>
-                <a:latin typeface="Arial Black" panose="020B0A04020102020204" pitchFamily="34" charset="0"/>
+                <a:latin typeface="Calibri" panose="020F0502020204030204"/>
                 <a:ea typeface="+mn-ea"/>
-                <a:cs typeface="Aharoni" panose="02010803020104030203" pitchFamily="2" charset="-79"/>
-              </a:rPr>
-              <a:t>div1</a:t>
-            </a:r>
-          </a:p>
-        </p:txBody>
-      </p:sp>
-      <p:sp>
-        <p:nvSpPr>
-          <p:cNvPr id="11" name="Rectangle 10">
-            <a:extLst>
-              <a:ext uri="{FF2B5EF4-FFF2-40B4-BE49-F238E27FC236}">
-                <a16:creationId xmlns:a16="http://schemas.microsoft.com/office/drawing/2014/main" id="{CCD204E2-9F76-7384-71C0-7DA8287AF336}"/>
-              </a:ext>
-            </a:extLst>
-          </p:cNvPr>
-          <p:cNvSpPr/>
-          <p:nvPr/>
-        </p:nvSpPr>
-        <p:spPr>
-          <a:xfrm>
-            <a:off x="879139" y="604914"/>
-            <a:ext cx="5655269" cy="399303"/>
-          </a:xfrm>
-          <a:prstGeom prst="rect">
-            <a:avLst/>
-          </a:prstGeom>
-          <a:noFill/>
-          <a:ln w="22225">
-            <a:solidFill>
-              <a:schemeClr val="accent4">
-                <a:lumMod val="75000"/>
+                <a:cs typeface="+mn-cs"/>
+              </a:endParaRPr>
+            </a:p>
+          </p:txBody>
+        </p:sp>
+        <p:sp>
+          <p:nvSpPr>
+            <p:cNvPr id="12" name="TextBox 11">
+              <a:extLst>
+                <a:ext uri="{FF2B5EF4-FFF2-40B4-BE49-F238E27FC236}">
+                  <a16:creationId xmlns:a16="http://schemas.microsoft.com/office/drawing/2014/main" id="{53593A55-6163-5D2D-0053-684208029102}"/>
+                </a:ext>
+              </a:extLst>
+            </p:cNvPr>
+            <p:cNvSpPr txBox="1"/>
+            <p:nvPr/>
+          </p:nvSpPr>
+          <p:spPr>
+            <a:xfrm>
+              <a:off x="5751330" y="640735"/>
+              <a:ext cx="728425" cy="369332"/>
+            </a:xfrm>
+            <a:prstGeom prst="rect">
+              <a:avLst/>
+            </a:prstGeom>
+            <a:noFill/>
+          </p:spPr>
+          <p:txBody>
+            <a:bodyPr wrap="square" rtlCol="0">
+              <a:spAutoFit/>
+            </a:bodyPr>
+            <a:lstStyle/>
+            <a:p>
+              <a:pPr marL="0" marR="0" lvl="0" indent="0" algn="ctr" defTabSz="914400" rtl="0" eaLnBrk="1" fontAlgn="auto" latinLnBrk="0" hangingPunct="1">
+                <a:lnSpc>
+                  <a:spcPct val="100000"/>
+                </a:lnSpc>
+                <a:spcBef>
+                  <a:spcPts val="0"/>
+                </a:spcBef>
+                <a:spcAft>
+                  <a:spcPts val="0"/>
+                </a:spcAft>
+                <a:buClrTx/>
+                <a:buSzTx/>
+                <a:buFontTx/>
+                <a:buNone/>
+                <a:tabLst/>
+                <a:defRPr/>
+              </a:pPr>
+              <a:r>
+                <a:rPr kumimoji="0" lang="en-US" sz="1800" b="0" i="0" u="none" strike="noStrike" kern="1200" cap="none" spc="0" normalizeH="0" baseline="0" noProof="0" dirty="0">
+                  <a:ln>
+                    <a:noFill/>
+                  </a:ln>
+                  <a:solidFill>
+                    <a:srgbClr val="FFC000">
+                      <a:lumMod val="75000"/>
+                    </a:srgbClr>
+                  </a:solidFill>
+                  <a:effectLst/>
+                  <a:uLnTx/>
+                  <a:uFillTx/>
+                  <a:latin typeface="Arial Black" panose="020B0A04020102020204" pitchFamily="34" charset="0"/>
+                  <a:ea typeface="+mn-ea"/>
+                  <a:cs typeface="Aharoni" panose="02010803020104030203" pitchFamily="2" charset="-79"/>
+                </a:rPr>
+                <a:t>div2</a:t>
+              </a:r>
+            </a:p>
+          </p:txBody>
+        </p:sp>
+        <p:sp>
+          <p:nvSpPr>
+            <p:cNvPr id="13" name="Rectangle 12">
+              <a:extLst>
+                <a:ext uri="{FF2B5EF4-FFF2-40B4-BE49-F238E27FC236}">
+                  <a16:creationId xmlns:a16="http://schemas.microsoft.com/office/drawing/2014/main" id="{6C10629B-DDE0-F9C5-84CF-9D55D2C35147}"/>
+                </a:ext>
+              </a:extLst>
+            </p:cNvPr>
+            <p:cNvSpPr/>
+            <p:nvPr/>
+          </p:nvSpPr>
+          <p:spPr>
+            <a:xfrm>
+              <a:off x="879139" y="1024584"/>
+              <a:ext cx="1743291" cy="2404416"/>
+            </a:xfrm>
+            <a:prstGeom prst="rect">
+              <a:avLst/>
+            </a:prstGeom>
+            <a:noFill/>
+            <a:ln w="22225">
+              <a:solidFill>
+                <a:schemeClr val="accent4">
+                  <a:lumMod val="75000"/>
+                </a:schemeClr>
+              </a:solidFill>
+              <a:prstDash val="dash"/>
+            </a:ln>
+          </p:spPr>
+          <p:style>
+            <a:lnRef idx="2">
+              <a:schemeClr val="accent1">
+                <a:shade val="50000"/>
               </a:schemeClr>
-            </a:solidFill>
-            <a:prstDash val="dash"/>
-          </a:ln>
-        </p:spPr>
-        <p:style>
-          <a:lnRef idx="2">
-            <a:schemeClr val="accent1">
-              <a:shade val="50000"/>
-            </a:schemeClr>
-          </a:lnRef>
-          <a:fillRef idx="1">
-            <a:schemeClr val="accent1"/>
-          </a:fillRef>
-          <a:effectRef idx="0">
-            <a:schemeClr val="accent1"/>
-          </a:effectRef>
-          <a:fontRef idx="minor">
-            <a:schemeClr val="lt1"/>
-          </a:fontRef>
-        </p:style>
-        <p:txBody>
-          <a:bodyPr rtlCol="0" anchor="ctr"/>
-          <a:lstStyle/>
-          <a:p>
-            <a:pPr marL="0" marR="0" lvl="0" indent="0" algn="ctr" defTabSz="914400" rtl="0" eaLnBrk="1" fontAlgn="auto" latinLnBrk="0" hangingPunct="1">
-              <a:lnSpc>
-                <a:spcPct val="100000"/>
-              </a:lnSpc>
-              <a:spcBef>
-                <a:spcPts val="0"/>
-              </a:spcBef>
-              <a:spcAft>
-                <a:spcPts val="0"/>
-              </a:spcAft>
-              <a:buClrTx/>
-              <a:buSzTx/>
-              <a:buFontTx/>
-              <a:buNone/>
-              <a:tabLst/>
-              <a:defRPr/>
-            </a:pPr>
-            <a:endParaRPr kumimoji="0" lang="en-US" sz="1800" b="0" i="0" u="none" strike="noStrike" kern="1200" cap="none" spc="0" normalizeH="0" baseline="0" noProof="0">
-              <a:ln>
-                <a:noFill/>
-              </a:ln>
-              <a:solidFill>
-                <a:prstClr val="white"/>
-              </a:solidFill>
-              <a:effectLst/>
-              <a:uLnTx/>
-              <a:uFillTx/>
-              <a:latin typeface="Calibri" panose="020F0502020204030204"/>
-              <a:ea typeface="+mn-ea"/>
-              <a:cs typeface="+mn-cs"/>
-            </a:endParaRPr>
-          </a:p>
-        </p:txBody>
-      </p:sp>
-      <p:sp>
-        <p:nvSpPr>
-          <p:cNvPr id="12" name="TextBox 11">
-            <a:extLst>
-              <a:ext uri="{FF2B5EF4-FFF2-40B4-BE49-F238E27FC236}">
-                <a16:creationId xmlns:a16="http://schemas.microsoft.com/office/drawing/2014/main" id="{53593A55-6163-5D2D-0053-684208029102}"/>
-              </a:ext>
-            </a:extLst>
-          </p:cNvPr>
-          <p:cNvSpPr txBox="1"/>
-          <p:nvPr/>
-        </p:nvSpPr>
-        <p:spPr>
-          <a:xfrm>
-            <a:off x="5751330" y="640735"/>
-            <a:ext cx="728425" cy="369332"/>
-          </a:xfrm>
-          <a:prstGeom prst="rect">
-            <a:avLst/>
-          </a:prstGeom>
-          <a:noFill/>
-        </p:spPr>
-        <p:txBody>
-          <a:bodyPr wrap="square" rtlCol="0">
-            <a:spAutoFit/>
-          </a:bodyPr>
-          <a:lstStyle/>
-          <a:p>
-            <a:pPr marL="0" marR="0" lvl="0" indent="0" algn="ctr" defTabSz="914400" rtl="0" eaLnBrk="1" fontAlgn="auto" latinLnBrk="0" hangingPunct="1">
-              <a:lnSpc>
-                <a:spcPct val="100000"/>
-              </a:lnSpc>
-              <a:spcBef>
-                <a:spcPts val="0"/>
-              </a:spcBef>
-              <a:spcAft>
-                <a:spcPts val="0"/>
-              </a:spcAft>
-              <a:buClrTx/>
-              <a:buSzTx/>
-              <a:buFontTx/>
-              <a:buNone/>
-              <a:tabLst/>
-              <a:defRPr/>
-            </a:pPr>
-            <a:r>
-              <a:rPr kumimoji="0" lang="en-US" sz="1800" b="0" i="0" u="none" strike="noStrike" kern="1200" cap="none" spc="0" normalizeH="0" baseline="0" noProof="0" dirty="0">
+            </a:lnRef>
+            <a:fillRef idx="1">
+              <a:schemeClr val="accent1"/>
+            </a:fillRef>
+            <a:effectRef idx="0">
+              <a:schemeClr val="accent1"/>
+            </a:effectRef>
+            <a:fontRef idx="minor">
+              <a:schemeClr val="lt1"/>
+            </a:fontRef>
+          </p:style>
+          <p:txBody>
+            <a:bodyPr rtlCol="0" anchor="ctr"/>
+            <a:lstStyle/>
+            <a:p>
+              <a:pPr marL="0" marR="0" lvl="0" indent="0" algn="ctr" defTabSz="914400" rtl="0" eaLnBrk="1" fontAlgn="auto" latinLnBrk="0" hangingPunct="1">
+                <a:lnSpc>
+                  <a:spcPct val="100000"/>
+                </a:lnSpc>
+                <a:spcBef>
+                  <a:spcPts val="0"/>
+                </a:spcBef>
+                <a:spcAft>
+                  <a:spcPts val="0"/>
+                </a:spcAft>
+                <a:buClrTx/>
+                <a:buSzTx/>
+                <a:buFontTx/>
+                <a:buNone/>
+                <a:tabLst/>
+                <a:defRPr/>
+              </a:pPr>
+              <a:endParaRPr kumimoji="0" lang="en-US" sz="1800" b="0" i="0" u="none" strike="noStrike" kern="1200" cap="none" spc="0" normalizeH="0" baseline="0" noProof="0">
                 <a:ln>
                   <a:noFill/>
                 </a:ln>
                 <a:solidFill>
-                  <a:srgbClr val="FFC000">
-                    <a:lumMod val="75000"/>
-                  </a:srgbClr>
+                  <a:prstClr val="white"/>
                 </a:solidFill>
                 <a:effectLst/>
                 <a:uLnTx/>
                 <a:uFillTx/>
-                <a:latin typeface="Arial Black" panose="020B0A04020102020204" pitchFamily="34" charset="0"/>
+                <a:latin typeface="Calibri" panose="020F0502020204030204"/>
                 <a:ea typeface="+mn-ea"/>
-                <a:cs typeface="Aharoni" panose="02010803020104030203" pitchFamily="2" charset="-79"/>
-              </a:rPr>
-              <a:t>div2</a:t>
-            </a:r>
-          </a:p>
-        </p:txBody>
-      </p:sp>
-      <p:sp>
-        <p:nvSpPr>
-          <p:cNvPr id="13" name="Rectangle 12">
-            <a:extLst>
-              <a:ext uri="{FF2B5EF4-FFF2-40B4-BE49-F238E27FC236}">
-                <a16:creationId xmlns:a16="http://schemas.microsoft.com/office/drawing/2014/main" id="{6C10629B-DDE0-F9C5-84CF-9D55D2C35147}"/>
-              </a:ext>
-            </a:extLst>
-          </p:cNvPr>
-          <p:cNvSpPr/>
-          <p:nvPr/>
-        </p:nvSpPr>
-        <p:spPr>
-          <a:xfrm>
-            <a:off x="879139" y="1024584"/>
-            <a:ext cx="1743291" cy="2404416"/>
-          </a:xfrm>
-          <a:prstGeom prst="rect">
-            <a:avLst/>
-          </a:prstGeom>
-          <a:noFill/>
-          <a:ln w="22225">
-            <a:solidFill>
-              <a:schemeClr val="accent4">
-                <a:lumMod val="75000"/>
+                <a:cs typeface="+mn-cs"/>
+              </a:endParaRPr>
+            </a:p>
+          </p:txBody>
+        </p:sp>
+        <p:sp>
+          <p:nvSpPr>
+            <p:cNvPr id="14" name="TextBox 13">
+              <a:extLst>
+                <a:ext uri="{FF2B5EF4-FFF2-40B4-BE49-F238E27FC236}">
+                  <a16:creationId xmlns:a16="http://schemas.microsoft.com/office/drawing/2014/main" id="{5D2806EC-7B51-8ED5-5A8E-304F6B4CA526}"/>
+                </a:ext>
+              </a:extLst>
+            </p:cNvPr>
+            <p:cNvSpPr txBox="1"/>
+            <p:nvPr/>
+          </p:nvSpPr>
+          <p:spPr>
+            <a:xfrm>
+              <a:off x="5042076" y="2226792"/>
+              <a:ext cx="728425" cy="369332"/>
+            </a:xfrm>
+            <a:prstGeom prst="rect">
+              <a:avLst/>
+            </a:prstGeom>
+            <a:noFill/>
+          </p:spPr>
+          <p:txBody>
+            <a:bodyPr wrap="square" rtlCol="0">
+              <a:spAutoFit/>
+            </a:bodyPr>
+            <a:lstStyle/>
+            <a:p>
+              <a:pPr marL="0" marR="0" lvl="0" indent="0" algn="ctr" defTabSz="914400" rtl="0" eaLnBrk="1" fontAlgn="auto" latinLnBrk="0" hangingPunct="1">
+                <a:lnSpc>
+                  <a:spcPct val="100000"/>
+                </a:lnSpc>
+                <a:spcBef>
+                  <a:spcPts val="0"/>
+                </a:spcBef>
+                <a:spcAft>
+                  <a:spcPts val="0"/>
+                </a:spcAft>
+                <a:buClrTx/>
+                <a:buSzTx/>
+                <a:buFontTx/>
+                <a:buNone/>
+                <a:tabLst/>
+                <a:defRPr/>
+              </a:pPr>
+              <a:r>
+                <a:rPr kumimoji="0" lang="en-US" sz="1800" b="0" i="0" u="none" strike="noStrike" kern="1200" cap="none" spc="0" normalizeH="0" baseline="0" noProof="0" dirty="0">
+                  <a:ln>
+                    <a:noFill/>
+                  </a:ln>
+                  <a:solidFill>
+                    <a:srgbClr val="FFC000">
+                      <a:lumMod val="75000"/>
+                    </a:srgbClr>
+                  </a:solidFill>
+                  <a:effectLst/>
+                  <a:uLnTx/>
+                  <a:uFillTx/>
+                  <a:latin typeface="Arial Black" panose="020B0A04020102020204" pitchFamily="34" charset="0"/>
+                  <a:ea typeface="+mn-ea"/>
+                  <a:cs typeface="Aharoni" panose="02010803020104030203" pitchFamily="2" charset="-79"/>
+                </a:rPr>
+                <a:t>div4</a:t>
+              </a:r>
+            </a:p>
+          </p:txBody>
+        </p:sp>
+        <p:sp>
+          <p:nvSpPr>
+            <p:cNvPr id="15" name="Rectangle 14">
+              <a:extLst>
+                <a:ext uri="{FF2B5EF4-FFF2-40B4-BE49-F238E27FC236}">
+                  <a16:creationId xmlns:a16="http://schemas.microsoft.com/office/drawing/2014/main" id="{AF2F88A4-13A7-CABC-2577-AE4C0F436577}"/>
+                </a:ext>
+              </a:extLst>
+            </p:cNvPr>
+            <p:cNvSpPr/>
+            <p:nvPr/>
+          </p:nvSpPr>
+          <p:spPr>
+            <a:xfrm>
+              <a:off x="2628181" y="1024584"/>
+              <a:ext cx="3906227" cy="2404416"/>
+            </a:xfrm>
+            <a:prstGeom prst="rect">
+              <a:avLst/>
+            </a:prstGeom>
+            <a:noFill/>
+            <a:ln w="22225">
+              <a:solidFill>
+                <a:schemeClr val="accent4">
+                  <a:lumMod val="75000"/>
+                </a:schemeClr>
+              </a:solidFill>
+              <a:prstDash val="dash"/>
+            </a:ln>
+          </p:spPr>
+          <p:style>
+            <a:lnRef idx="2">
+              <a:schemeClr val="accent1">
+                <a:shade val="50000"/>
               </a:schemeClr>
-            </a:solidFill>
-            <a:prstDash val="dash"/>
-          </a:ln>
-        </p:spPr>
-        <p:style>
-          <a:lnRef idx="2">
-            <a:schemeClr val="accent1">
-              <a:shade val="50000"/>
-            </a:schemeClr>
-          </a:lnRef>
-          <a:fillRef idx="1">
-            <a:schemeClr val="accent1"/>
-          </a:fillRef>
-          <a:effectRef idx="0">
-            <a:schemeClr val="accent1"/>
-          </a:effectRef>
-          <a:fontRef idx="minor">
-            <a:schemeClr val="lt1"/>
-          </a:fontRef>
-        </p:style>
-        <p:txBody>
-          <a:bodyPr rtlCol="0" anchor="ctr"/>
-          <a:lstStyle/>
-          <a:p>
-            <a:pPr marL="0" marR="0" lvl="0" indent="0" algn="ctr" defTabSz="914400" rtl="0" eaLnBrk="1" fontAlgn="auto" latinLnBrk="0" hangingPunct="1">
-              <a:lnSpc>
-                <a:spcPct val="100000"/>
-              </a:lnSpc>
-              <a:spcBef>
-                <a:spcPts val="0"/>
-              </a:spcBef>
-              <a:spcAft>
-                <a:spcPts val="0"/>
-              </a:spcAft>
-              <a:buClrTx/>
-              <a:buSzTx/>
-              <a:buFontTx/>
-              <a:buNone/>
-              <a:tabLst/>
-              <a:defRPr/>
-            </a:pPr>
-            <a:endParaRPr kumimoji="0" lang="en-US" sz="1800" b="0" i="0" u="none" strike="noStrike" kern="1200" cap="none" spc="0" normalizeH="0" baseline="0" noProof="0">
-              <a:ln>
-                <a:noFill/>
-              </a:ln>
-              <a:solidFill>
-                <a:prstClr val="white"/>
-              </a:solidFill>
-              <a:effectLst/>
-              <a:uLnTx/>
-              <a:uFillTx/>
-              <a:latin typeface="Calibri" panose="020F0502020204030204"/>
-              <a:ea typeface="+mn-ea"/>
-              <a:cs typeface="+mn-cs"/>
-            </a:endParaRPr>
-          </a:p>
-        </p:txBody>
-      </p:sp>
-      <p:sp>
-        <p:nvSpPr>
-          <p:cNvPr id="14" name="TextBox 13">
-            <a:extLst>
-              <a:ext uri="{FF2B5EF4-FFF2-40B4-BE49-F238E27FC236}">
-                <a16:creationId xmlns:a16="http://schemas.microsoft.com/office/drawing/2014/main" id="{5D2806EC-7B51-8ED5-5A8E-304F6B4CA526}"/>
-              </a:ext>
-            </a:extLst>
-          </p:cNvPr>
-          <p:cNvSpPr txBox="1"/>
-          <p:nvPr/>
-        </p:nvSpPr>
-        <p:spPr>
-          <a:xfrm>
-            <a:off x="5042076" y="2226792"/>
-            <a:ext cx="728425" cy="369332"/>
-          </a:xfrm>
-          <a:prstGeom prst="rect">
-            <a:avLst/>
-          </a:prstGeom>
-          <a:noFill/>
-        </p:spPr>
-        <p:txBody>
-          <a:bodyPr wrap="square" rtlCol="0">
-            <a:spAutoFit/>
-          </a:bodyPr>
-          <a:lstStyle/>
-          <a:p>
-            <a:pPr marL="0" marR="0" lvl="0" indent="0" algn="ctr" defTabSz="914400" rtl="0" eaLnBrk="1" fontAlgn="auto" latinLnBrk="0" hangingPunct="1">
-              <a:lnSpc>
-                <a:spcPct val="100000"/>
-              </a:lnSpc>
-              <a:spcBef>
-                <a:spcPts val="0"/>
-              </a:spcBef>
-              <a:spcAft>
-                <a:spcPts val="0"/>
-              </a:spcAft>
-              <a:buClrTx/>
-              <a:buSzTx/>
-              <a:buFontTx/>
-              <a:buNone/>
-              <a:tabLst/>
-              <a:defRPr/>
-            </a:pPr>
-            <a:r>
-              <a:rPr kumimoji="0" lang="en-US" sz="1800" b="0" i="0" u="none" strike="noStrike" kern="1200" cap="none" spc="0" normalizeH="0" baseline="0" noProof="0" dirty="0">
+            </a:lnRef>
+            <a:fillRef idx="1">
+              <a:schemeClr val="accent1"/>
+            </a:fillRef>
+            <a:effectRef idx="0">
+              <a:schemeClr val="accent1"/>
+            </a:effectRef>
+            <a:fontRef idx="minor">
+              <a:schemeClr val="lt1"/>
+            </a:fontRef>
+          </p:style>
+          <p:txBody>
+            <a:bodyPr rtlCol="0" anchor="ctr"/>
+            <a:lstStyle/>
+            <a:p>
+              <a:pPr marL="0" marR="0" lvl="0" indent="0" algn="ctr" defTabSz="914400" rtl="0" eaLnBrk="1" fontAlgn="auto" latinLnBrk="0" hangingPunct="1">
+                <a:lnSpc>
+                  <a:spcPct val="100000"/>
+                </a:lnSpc>
+                <a:spcBef>
+                  <a:spcPts val="0"/>
+                </a:spcBef>
+                <a:spcAft>
+                  <a:spcPts val="0"/>
+                </a:spcAft>
+                <a:buClrTx/>
+                <a:buSzTx/>
+                <a:buFontTx/>
+                <a:buNone/>
+                <a:tabLst/>
+                <a:defRPr/>
+              </a:pPr>
+              <a:endParaRPr kumimoji="0" lang="en-US" sz="1800" b="0" i="0" u="none" strike="noStrike" kern="1200" cap="none" spc="0" normalizeH="0" baseline="0" noProof="0">
                 <a:ln>
                   <a:noFill/>
                 </a:ln>
                 <a:solidFill>
-                  <a:srgbClr val="FFC000">
-                    <a:lumMod val="75000"/>
-                  </a:srgbClr>
+                  <a:prstClr val="white"/>
                 </a:solidFill>
                 <a:effectLst/>
                 <a:uLnTx/>
                 <a:uFillTx/>
-                <a:latin typeface="Arial Black" panose="020B0A04020102020204" pitchFamily="34" charset="0"/>
+                <a:latin typeface="Calibri" panose="020F0502020204030204"/>
                 <a:ea typeface="+mn-ea"/>
-                <a:cs typeface="Aharoni" panose="02010803020104030203" pitchFamily="2" charset="-79"/>
-              </a:rPr>
-              <a:t>div4</a:t>
-            </a:r>
-          </a:p>
-        </p:txBody>
-      </p:sp>
-      <p:sp>
-        <p:nvSpPr>
-          <p:cNvPr id="15" name="Rectangle 14">
-            <a:extLst>
-              <a:ext uri="{FF2B5EF4-FFF2-40B4-BE49-F238E27FC236}">
-                <a16:creationId xmlns:a16="http://schemas.microsoft.com/office/drawing/2014/main" id="{AF2F88A4-13A7-CABC-2577-AE4C0F436577}"/>
-              </a:ext>
-            </a:extLst>
-          </p:cNvPr>
-          <p:cNvSpPr/>
-          <p:nvPr/>
-        </p:nvSpPr>
-        <p:spPr>
-          <a:xfrm>
-            <a:off x="2628181" y="1024584"/>
-            <a:ext cx="3906227" cy="2404416"/>
-          </a:xfrm>
-          <a:prstGeom prst="rect">
-            <a:avLst/>
-          </a:prstGeom>
-          <a:noFill/>
-          <a:ln w="22225">
-            <a:solidFill>
-              <a:schemeClr val="accent4">
-                <a:lumMod val="75000"/>
+                <a:cs typeface="+mn-cs"/>
+              </a:endParaRPr>
+            </a:p>
+          </p:txBody>
+        </p:sp>
+        <p:sp>
+          <p:nvSpPr>
+            <p:cNvPr id="16" name="Rectangle 15">
+              <a:extLst>
+                <a:ext uri="{FF2B5EF4-FFF2-40B4-BE49-F238E27FC236}">
+                  <a16:creationId xmlns:a16="http://schemas.microsoft.com/office/drawing/2014/main" id="{D0A8E2BB-985C-5C00-1512-35AE75B20D63}"/>
+                </a:ext>
+              </a:extLst>
+            </p:cNvPr>
+            <p:cNvSpPr/>
+            <p:nvPr/>
+          </p:nvSpPr>
+          <p:spPr>
+            <a:xfrm>
+              <a:off x="879139" y="3457512"/>
+              <a:ext cx="1743291" cy="1528556"/>
+            </a:xfrm>
+            <a:prstGeom prst="rect">
+              <a:avLst/>
+            </a:prstGeom>
+            <a:noFill/>
+            <a:ln w="22225">
+              <a:solidFill>
+                <a:schemeClr val="accent4">
+                  <a:lumMod val="75000"/>
+                </a:schemeClr>
+              </a:solidFill>
+              <a:prstDash val="dash"/>
+            </a:ln>
+          </p:spPr>
+          <p:style>
+            <a:lnRef idx="2">
+              <a:schemeClr val="accent1">
+                <a:shade val="50000"/>
               </a:schemeClr>
-            </a:solidFill>
-            <a:prstDash val="dash"/>
-          </a:ln>
-        </p:spPr>
-        <p:style>
-          <a:lnRef idx="2">
-            <a:schemeClr val="accent1">
-              <a:shade val="50000"/>
-            </a:schemeClr>
-          </a:lnRef>
-          <a:fillRef idx="1">
-            <a:schemeClr val="accent1"/>
-          </a:fillRef>
-          <a:effectRef idx="0">
-            <a:schemeClr val="accent1"/>
-          </a:effectRef>
-          <a:fontRef idx="minor">
-            <a:schemeClr val="lt1"/>
-          </a:fontRef>
-        </p:style>
-        <p:txBody>
-          <a:bodyPr rtlCol="0" anchor="ctr"/>
-          <a:lstStyle/>
-          <a:p>
-            <a:pPr marL="0" marR="0" lvl="0" indent="0" algn="ctr" defTabSz="914400" rtl="0" eaLnBrk="1" fontAlgn="auto" latinLnBrk="0" hangingPunct="1">
-              <a:lnSpc>
-                <a:spcPct val="100000"/>
-              </a:lnSpc>
-              <a:spcBef>
-                <a:spcPts val="0"/>
-              </a:spcBef>
-              <a:spcAft>
-                <a:spcPts val="0"/>
-              </a:spcAft>
-              <a:buClrTx/>
-              <a:buSzTx/>
-              <a:buFontTx/>
-              <a:buNone/>
-              <a:tabLst/>
-              <a:defRPr/>
-            </a:pPr>
-            <a:endParaRPr kumimoji="0" lang="en-US" sz="1800" b="0" i="0" u="none" strike="noStrike" kern="1200" cap="none" spc="0" normalizeH="0" baseline="0" noProof="0">
-              <a:ln>
-                <a:noFill/>
-              </a:ln>
-              <a:solidFill>
-                <a:prstClr val="white"/>
-              </a:solidFill>
-              <a:effectLst/>
-              <a:uLnTx/>
-              <a:uFillTx/>
-              <a:latin typeface="Calibri" panose="020F0502020204030204"/>
-              <a:ea typeface="+mn-ea"/>
-              <a:cs typeface="+mn-cs"/>
-            </a:endParaRPr>
-          </a:p>
-        </p:txBody>
-      </p:sp>
-      <p:sp>
-        <p:nvSpPr>
-          <p:cNvPr id="16" name="Rectangle 15">
-            <a:extLst>
-              <a:ext uri="{FF2B5EF4-FFF2-40B4-BE49-F238E27FC236}">
-                <a16:creationId xmlns:a16="http://schemas.microsoft.com/office/drawing/2014/main" id="{D0A8E2BB-985C-5C00-1512-35AE75B20D63}"/>
-              </a:ext>
-            </a:extLst>
-          </p:cNvPr>
-          <p:cNvSpPr/>
-          <p:nvPr/>
-        </p:nvSpPr>
-        <p:spPr>
-          <a:xfrm>
-            <a:off x="879139" y="3457512"/>
-            <a:ext cx="1743291" cy="1528556"/>
-          </a:xfrm>
-          <a:prstGeom prst="rect">
-            <a:avLst/>
-          </a:prstGeom>
-          <a:noFill/>
-          <a:ln w="22225">
-            <a:solidFill>
-              <a:schemeClr val="accent4">
-                <a:lumMod val="75000"/>
-              </a:schemeClr>
-            </a:solidFill>
-            <a:prstDash val="dash"/>
-          </a:ln>
-        </p:spPr>
-        <p:style>
-          <a:lnRef idx="2">
-            <a:schemeClr val="accent1">
-              <a:shade val="50000"/>
-            </a:schemeClr>
-          </a:lnRef>
-          <a:fillRef idx="1">
-            <a:schemeClr val="accent1"/>
-          </a:fillRef>
-          <a:effectRef idx="0">
-            <a:schemeClr val="accent1"/>
-          </a:effectRef>
-          <a:fontRef idx="minor">
-            <a:schemeClr val="lt1"/>
-          </a:fontRef>
-        </p:style>
-        <p:txBody>
-          <a:bodyPr rtlCol="0" anchor="ctr"/>
-          <a:lstStyle/>
-          <a:p>
-            <a:pPr marL="0" marR="0" lvl="0" indent="0" algn="ctr" defTabSz="914400" rtl="0" eaLnBrk="1" fontAlgn="auto" latinLnBrk="0" hangingPunct="1">
-              <a:lnSpc>
-                <a:spcPct val="100000"/>
-              </a:lnSpc>
-              <a:spcBef>
-                <a:spcPts val="0"/>
-              </a:spcBef>
-              <a:spcAft>
-                <a:spcPts val="0"/>
-              </a:spcAft>
-              <a:buClrTx/>
-              <a:buSzTx/>
-              <a:buFontTx/>
-              <a:buNone/>
-              <a:tabLst/>
-              <a:defRPr/>
-            </a:pPr>
-            <a:endParaRPr kumimoji="0" lang="en-US" sz="1800" b="0" i="0" u="none" strike="noStrike" kern="1200" cap="none" spc="0" normalizeH="0" baseline="0" noProof="0">
-              <a:ln>
-                <a:noFill/>
-              </a:ln>
-              <a:solidFill>
-                <a:prstClr val="white"/>
-              </a:solidFill>
-              <a:effectLst/>
-              <a:uLnTx/>
-              <a:uFillTx/>
-              <a:latin typeface="Calibri" panose="020F0502020204030204"/>
-              <a:ea typeface="+mn-ea"/>
-              <a:cs typeface="+mn-cs"/>
-            </a:endParaRPr>
-          </a:p>
-        </p:txBody>
-      </p:sp>
-      <p:sp>
-        <p:nvSpPr>
-          <p:cNvPr id="17" name="Rectangle 16">
-            <a:extLst>
-              <a:ext uri="{FF2B5EF4-FFF2-40B4-BE49-F238E27FC236}">
-                <a16:creationId xmlns:a16="http://schemas.microsoft.com/office/drawing/2014/main" id="{98A93642-CD71-5B00-63CB-C327B4418834}"/>
-              </a:ext>
-            </a:extLst>
-          </p:cNvPr>
-          <p:cNvSpPr/>
-          <p:nvPr/>
-        </p:nvSpPr>
-        <p:spPr>
-          <a:xfrm>
-            <a:off x="2622430" y="3457512"/>
-            <a:ext cx="1923691" cy="1528556"/>
-          </a:xfrm>
-          <a:prstGeom prst="rect">
-            <a:avLst/>
-          </a:prstGeom>
-          <a:noFill/>
-          <a:ln w="22225">
-            <a:solidFill>
-              <a:schemeClr val="accent4">
-                <a:lumMod val="75000"/>
-              </a:schemeClr>
-            </a:solidFill>
-            <a:prstDash val="dash"/>
-          </a:ln>
-        </p:spPr>
-        <p:style>
-          <a:lnRef idx="2">
-            <a:schemeClr val="accent1">
-              <a:shade val="50000"/>
-            </a:schemeClr>
-          </a:lnRef>
-          <a:fillRef idx="1">
-            <a:schemeClr val="accent1"/>
-          </a:fillRef>
-          <a:effectRef idx="0">
-            <a:schemeClr val="accent1"/>
-          </a:effectRef>
-          <a:fontRef idx="minor">
-            <a:schemeClr val="lt1"/>
-          </a:fontRef>
-        </p:style>
-        <p:txBody>
-          <a:bodyPr rtlCol="0" anchor="ctr"/>
-          <a:lstStyle/>
-          <a:p>
-            <a:pPr marL="0" marR="0" lvl="0" indent="0" algn="ctr" defTabSz="914400" rtl="0" eaLnBrk="1" fontAlgn="auto" latinLnBrk="0" hangingPunct="1">
-              <a:lnSpc>
-                <a:spcPct val="100000"/>
-              </a:lnSpc>
-              <a:spcBef>
-                <a:spcPts val="0"/>
-              </a:spcBef>
-              <a:spcAft>
-                <a:spcPts val="0"/>
-              </a:spcAft>
-              <a:buClrTx/>
-              <a:buSzTx/>
-              <a:buFontTx/>
-              <a:buNone/>
-              <a:tabLst/>
-              <a:defRPr/>
-            </a:pPr>
-            <a:endParaRPr kumimoji="0" lang="en-US" sz="1800" b="0" i="0" u="none" strike="noStrike" kern="1200" cap="none" spc="0" normalizeH="0" baseline="0" noProof="0">
-              <a:ln>
-                <a:noFill/>
-              </a:ln>
-              <a:solidFill>
-                <a:prstClr val="white"/>
-              </a:solidFill>
-              <a:effectLst/>
-              <a:uLnTx/>
-              <a:uFillTx/>
-              <a:latin typeface="Calibri" panose="020F0502020204030204"/>
-              <a:ea typeface="+mn-ea"/>
-              <a:cs typeface="+mn-cs"/>
-            </a:endParaRPr>
-          </a:p>
-        </p:txBody>
-      </p:sp>
-      <p:sp>
-        <p:nvSpPr>
-          <p:cNvPr id="18" name="Rectangle 17">
-            <a:extLst>
-              <a:ext uri="{FF2B5EF4-FFF2-40B4-BE49-F238E27FC236}">
-                <a16:creationId xmlns:a16="http://schemas.microsoft.com/office/drawing/2014/main" id="{6D2F273E-9B95-8321-B147-A0B801B7AC37}"/>
-              </a:ext>
-            </a:extLst>
-          </p:cNvPr>
-          <p:cNvSpPr/>
-          <p:nvPr/>
-        </p:nvSpPr>
-        <p:spPr>
-          <a:xfrm>
-            <a:off x="4546121" y="3443517"/>
-            <a:ext cx="1988287" cy="1528556"/>
-          </a:xfrm>
-          <a:prstGeom prst="rect">
-            <a:avLst/>
-          </a:prstGeom>
-          <a:noFill/>
-          <a:ln w="22225">
-            <a:solidFill>
-              <a:schemeClr val="accent4">
-                <a:lumMod val="75000"/>
-              </a:schemeClr>
-            </a:solidFill>
-            <a:prstDash val="dash"/>
-          </a:ln>
-        </p:spPr>
-        <p:style>
-          <a:lnRef idx="2">
-            <a:schemeClr val="accent1">
-              <a:shade val="50000"/>
-            </a:schemeClr>
-          </a:lnRef>
-          <a:fillRef idx="1">
-            <a:schemeClr val="accent1"/>
-          </a:fillRef>
-          <a:effectRef idx="0">
-            <a:schemeClr val="accent1"/>
-          </a:effectRef>
-          <a:fontRef idx="minor">
-            <a:schemeClr val="lt1"/>
-          </a:fontRef>
-        </p:style>
-        <p:txBody>
-          <a:bodyPr rtlCol="0" anchor="ctr"/>
-          <a:lstStyle/>
-          <a:p>
-            <a:pPr marL="0" marR="0" lvl="0" indent="0" algn="ctr" defTabSz="914400" rtl="0" eaLnBrk="1" fontAlgn="auto" latinLnBrk="0" hangingPunct="1">
-              <a:lnSpc>
-                <a:spcPct val="100000"/>
-              </a:lnSpc>
-              <a:spcBef>
-                <a:spcPts val="0"/>
-              </a:spcBef>
-              <a:spcAft>
-                <a:spcPts val="0"/>
-              </a:spcAft>
-              <a:buClrTx/>
-              <a:buSzTx/>
-              <a:buFontTx/>
-              <a:buNone/>
-              <a:tabLst/>
-              <a:defRPr/>
-            </a:pPr>
-            <a:endParaRPr kumimoji="0" lang="en-US" sz="1800" b="0" i="0" u="none" strike="noStrike" kern="1200" cap="none" spc="0" normalizeH="0" baseline="0" noProof="0">
-              <a:ln>
-                <a:noFill/>
-              </a:ln>
-              <a:solidFill>
-                <a:prstClr val="white"/>
-              </a:solidFill>
-              <a:effectLst/>
-              <a:uLnTx/>
-              <a:uFillTx/>
-              <a:latin typeface="Calibri" panose="020F0502020204030204"/>
-              <a:ea typeface="+mn-ea"/>
-              <a:cs typeface="+mn-cs"/>
-            </a:endParaRPr>
-          </a:p>
-        </p:txBody>
-      </p:sp>
-      <p:sp>
-        <p:nvSpPr>
-          <p:cNvPr id="19" name="Rectangle 18">
-            <a:extLst>
-              <a:ext uri="{FF2B5EF4-FFF2-40B4-BE49-F238E27FC236}">
-                <a16:creationId xmlns:a16="http://schemas.microsoft.com/office/drawing/2014/main" id="{94CC453B-12C8-2197-8D47-49C2ED8D00D9}"/>
-              </a:ext>
-            </a:extLst>
-          </p:cNvPr>
-          <p:cNvSpPr/>
-          <p:nvPr/>
-        </p:nvSpPr>
-        <p:spPr>
-          <a:xfrm>
-            <a:off x="879139" y="5000062"/>
-            <a:ext cx="1743291" cy="1657401"/>
-          </a:xfrm>
-          <a:prstGeom prst="rect">
-            <a:avLst/>
-          </a:prstGeom>
-          <a:noFill/>
-          <a:ln w="22225">
-            <a:solidFill>
-              <a:schemeClr val="accent4">
-                <a:lumMod val="75000"/>
-              </a:schemeClr>
-            </a:solidFill>
-            <a:prstDash val="dash"/>
-          </a:ln>
-        </p:spPr>
-        <p:style>
-          <a:lnRef idx="2">
-            <a:schemeClr val="accent1">
-              <a:shade val="50000"/>
-            </a:schemeClr>
-          </a:lnRef>
-          <a:fillRef idx="1">
-            <a:schemeClr val="accent1"/>
-          </a:fillRef>
-          <a:effectRef idx="0">
-            <a:schemeClr val="accent1"/>
-          </a:effectRef>
-          <a:fontRef idx="minor">
-            <a:schemeClr val="lt1"/>
-          </a:fontRef>
-        </p:style>
-        <p:txBody>
-          <a:bodyPr rtlCol="0" anchor="ctr"/>
-          <a:lstStyle/>
-          <a:p>
-            <a:pPr marL="0" marR="0" lvl="0" indent="0" algn="ctr" defTabSz="914400" rtl="0" eaLnBrk="1" fontAlgn="auto" latinLnBrk="0" hangingPunct="1">
-              <a:lnSpc>
-                <a:spcPct val="100000"/>
-              </a:lnSpc>
-              <a:spcBef>
-                <a:spcPts val="0"/>
-              </a:spcBef>
-              <a:spcAft>
-                <a:spcPts val="0"/>
-              </a:spcAft>
-              <a:buClrTx/>
-              <a:buSzTx/>
-              <a:buFontTx/>
-              <a:buNone/>
-              <a:tabLst/>
-              <a:defRPr/>
-            </a:pPr>
-            <a:endParaRPr kumimoji="0" lang="en-US" sz="1800" b="0" i="0" u="none" strike="noStrike" kern="1200" cap="none" spc="0" normalizeH="0" baseline="0" noProof="0">
-              <a:ln>
-                <a:noFill/>
-              </a:ln>
-              <a:solidFill>
-                <a:prstClr val="white"/>
-              </a:solidFill>
-              <a:effectLst/>
-              <a:uLnTx/>
-              <a:uFillTx/>
-              <a:latin typeface="Calibri" panose="020F0502020204030204"/>
-              <a:ea typeface="+mn-ea"/>
-              <a:cs typeface="+mn-cs"/>
-            </a:endParaRPr>
-          </a:p>
-        </p:txBody>
-      </p:sp>
-      <p:sp>
-        <p:nvSpPr>
-          <p:cNvPr id="20" name="Rectangle 19">
-            <a:extLst>
-              <a:ext uri="{FF2B5EF4-FFF2-40B4-BE49-F238E27FC236}">
-                <a16:creationId xmlns:a16="http://schemas.microsoft.com/office/drawing/2014/main" id="{43130FB6-9DBE-4A44-7FEA-F0D64BF1E981}"/>
-              </a:ext>
-            </a:extLst>
-          </p:cNvPr>
-          <p:cNvSpPr/>
-          <p:nvPr/>
-        </p:nvSpPr>
-        <p:spPr>
-          <a:xfrm>
-            <a:off x="2622430" y="5000062"/>
-            <a:ext cx="3911978" cy="1678544"/>
-          </a:xfrm>
-          <a:prstGeom prst="rect">
-            <a:avLst/>
-          </a:prstGeom>
-          <a:noFill/>
-          <a:ln w="22225">
-            <a:solidFill>
-              <a:schemeClr val="accent4">
-                <a:lumMod val="75000"/>
-              </a:schemeClr>
-            </a:solidFill>
-            <a:prstDash val="dash"/>
-          </a:ln>
-        </p:spPr>
-        <p:style>
-          <a:lnRef idx="2">
-            <a:schemeClr val="accent1">
-              <a:shade val="50000"/>
-            </a:schemeClr>
-          </a:lnRef>
-          <a:fillRef idx="1">
-            <a:schemeClr val="accent1"/>
-          </a:fillRef>
-          <a:effectRef idx="0">
-            <a:schemeClr val="accent1"/>
-          </a:effectRef>
-          <a:fontRef idx="minor">
-            <a:schemeClr val="lt1"/>
-          </a:fontRef>
-        </p:style>
-        <p:txBody>
-          <a:bodyPr rtlCol="0" anchor="ctr"/>
-          <a:lstStyle/>
-          <a:p>
-            <a:pPr marL="0" marR="0" lvl="0" indent="0" algn="ctr" defTabSz="914400" rtl="0" eaLnBrk="1" fontAlgn="auto" latinLnBrk="0" hangingPunct="1">
-              <a:lnSpc>
-                <a:spcPct val="100000"/>
-              </a:lnSpc>
-              <a:spcBef>
-                <a:spcPts val="0"/>
-              </a:spcBef>
-              <a:spcAft>
-                <a:spcPts val="0"/>
-              </a:spcAft>
-              <a:buClrTx/>
-              <a:buSzTx/>
-              <a:buFontTx/>
-              <a:buNone/>
-              <a:tabLst/>
-              <a:defRPr/>
-            </a:pPr>
-            <a:endParaRPr kumimoji="0" lang="en-US" sz="1800" b="0" i="0" u="none" strike="noStrike" kern="1200" cap="none" spc="0" normalizeH="0" baseline="0" noProof="0">
-              <a:ln>
-                <a:noFill/>
-              </a:ln>
-              <a:solidFill>
-                <a:prstClr val="white"/>
-              </a:solidFill>
-              <a:effectLst/>
-              <a:uLnTx/>
-              <a:uFillTx/>
-              <a:latin typeface="Calibri" panose="020F0502020204030204"/>
-              <a:ea typeface="+mn-ea"/>
-              <a:cs typeface="+mn-cs"/>
-            </a:endParaRPr>
-          </a:p>
-        </p:txBody>
-      </p:sp>
-      <p:sp>
-        <p:nvSpPr>
-          <p:cNvPr id="21" name="TextBox 20">
-            <a:extLst>
-              <a:ext uri="{FF2B5EF4-FFF2-40B4-BE49-F238E27FC236}">
-                <a16:creationId xmlns:a16="http://schemas.microsoft.com/office/drawing/2014/main" id="{2AB2F5F9-FAEA-E179-9FFC-BE13113BF911}"/>
-              </a:ext>
-            </a:extLst>
-          </p:cNvPr>
-          <p:cNvSpPr txBox="1"/>
-          <p:nvPr/>
-        </p:nvSpPr>
-        <p:spPr>
-          <a:xfrm>
-            <a:off x="1351885" y="2226792"/>
-            <a:ext cx="728425" cy="369332"/>
-          </a:xfrm>
-          <a:prstGeom prst="rect">
-            <a:avLst/>
-          </a:prstGeom>
-          <a:noFill/>
-        </p:spPr>
-        <p:txBody>
-          <a:bodyPr wrap="square" rtlCol="0">
-            <a:spAutoFit/>
-          </a:bodyPr>
-          <a:lstStyle/>
-          <a:p>
-            <a:pPr marL="0" marR="0" lvl="0" indent="0" algn="ctr" defTabSz="914400" rtl="0" eaLnBrk="1" fontAlgn="auto" latinLnBrk="0" hangingPunct="1">
-              <a:lnSpc>
-                <a:spcPct val="100000"/>
-              </a:lnSpc>
-              <a:spcBef>
-                <a:spcPts val="0"/>
-              </a:spcBef>
-              <a:spcAft>
-                <a:spcPts val="0"/>
-              </a:spcAft>
-              <a:buClrTx/>
-              <a:buSzTx/>
-              <a:buFontTx/>
-              <a:buNone/>
-              <a:tabLst/>
-              <a:defRPr/>
-            </a:pPr>
-            <a:r>
-              <a:rPr kumimoji="0" lang="en-US" sz="1800" b="0" i="0" u="none" strike="noStrike" kern="1200" cap="none" spc="0" normalizeH="0" baseline="0" noProof="0" dirty="0">
+            </a:lnRef>
+            <a:fillRef idx="1">
+              <a:schemeClr val="accent1"/>
+            </a:fillRef>
+            <a:effectRef idx="0">
+              <a:schemeClr val="accent1"/>
+            </a:effectRef>
+            <a:fontRef idx="minor">
+              <a:schemeClr val="lt1"/>
+            </a:fontRef>
+          </p:style>
+          <p:txBody>
+            <a:bodyPr rtlCol="0" anchor="ctr"/>
+            <a:lstStyle/>
+            <a:p>
+              <a:pPr marL="0" marR="0" lvl="0" indent="0" algn="ctr" defTabSz="914400" rtl="0" eaLnBrk="1" fontAlgn="auto" latinLnBrk="0" hangingPunct="1">
+                <a:lnSpc>
+                  <a:spcPct val="100000"/>
+                </a:lnSpc>
+                <a:spcBef>
+                  <a:spcPts val="0"/>
+                </a:spcBef>
+                <a:spcAft>
+                  <a:spcPts val="0"/>
+                </a:spcAft>
+                <a:buClrTx/>
+                <a:buSzTx/>
+                <a:buFontTx/>
+                <a:buNone/>
+                <a:tabLst/>
+                <a:defRPr/>
+              </a:pPr>
+              <a:endParaRPr kumimoji="0" lang="en-US" sz="1800" b="0" i="0" u="none" strike="noStrike" kern="1200" cap="none" spc="0" normalizeH="0" baseline="0" noProof="0">
                 <a:ln>
                   <a:noFill/>
                 </a:ln>
                 <a:solidFill>
-                  <a:srgbClr val="FFC000">
-                    <a:lumMod val="75000"/>
-                  </a:srgbClr>
+                  <a:prstClr val="white"/>
                 </a:solidFill>
                 <a:effectLst/>
                 <a:uLnTx/>
                 <a:uFillTx/>
-                <a:latin typeface="Arial Black" panose="020B0A04020102020204" pitchFamily="34" charset="0"/>
+                <a:latin typeface="Calibri" panose="020F0502020204030204"/>
                 <a:ea typeface="+mn-ea"/>
-                <a:cs typeface="Aharoni" panose="02010803020104030203" pitchFamily="2" charset="-79"/>
-              </a:rPr>
-              <a:t>div3</a:t>
-            </a:r>
-          </a:p>
-        </p:txBody>
-      </p:sp>
-      <p:sp>
-        <p:nvSpPr>
-          <p:cNvPr id="22" name="TextBox 21">
-            <a:extLst>
-              <a:ext uri="{FF2B5EF4-FFF2-40B4-BE49-F238E27FC236}">
-                <a16:creationId xmlns:a16="http://schemas.microsoft.com/office/drawing/2014/main" id="{6C12264B-7A77-8183-A30D-57989421D72C}"/>
-              </a:ext>
-            </a:extLst>
-          </p:cNvPr>
-          <p:cNvSpPr txBox="1"/>
-          <p:nvPr/>
-        </p:nvSpPr>
-        <p:spPr>
-          <a:xfrm>
-            <a:off x="1763366" y="3798332"/>
-            <a:ext cx="728425" cy="369332"/>
-          </a:xfrm>
-          <a:prstGeom prst="rect">
-            <a:avLst/>
-          </a:prstGeom>
-          <a:solidFill>
-            <a:schemeClr val="bg1"/>
-          </a:solidFill>
-        </p:spPr>
-        <p:txBody>
-          <a:bodyPr wrap="square" rtlCol="0">
-            <a:spAutoFit/>
-          </a:bodyPr>
-          <a:lstStyle/>
-          <a:p>
-            <a:pPr marL="0" marR="0" lvl="0" indent="0" algn="ctr" defTabSz="914400" rtl="0" eaLnBrk="1" fontAlgn="auto" latinLnBrk="0" hangingPunct="1">
-              <a:lnSpc>
-                <a:spcPct val="100000"/>
-              </a:lnSpc>
-              <a:spcBef>
-                <a:spcPts val="0"/>
-              </a:spcBef>
-              <a:spcAft>
-                <a:spcPts val="0"/>
-              </a:spcAft>
-              <a:buClrTx/>
-              <a:buSzTx/>
-              <a:buFontTx/>
-              <a:buNone/>
-              <a:tabLst/>
-              <a:defRPr/>
-            </a:pPr>
-            <a:r>
-              <a:rPr kumimoji="0" lang="en-US" sz="1800" b="0" i="0" u="none" strike="noStrike" kern="1200" cap="none" spc="0" normalizeH="0" baseline="0" noProof="0" dirty="0">
+                <a:cs typeface="+mn-cs"/>
+              </a:endParaRPr>
+            </a:p>
+          </p:txBody>
+        </p:sp>
+        <p:sp>
+          <p:nvSpPr>
+            <p:cNvPr id="17" name="Rectangle 16">
+              <a:extLst>
+                <a:ext uri="{FF2B5EF4-FFF2-40B4-BE49-F238E27FC236}">
+                  <a16:creationId xmlns:a16="http://schemas.microsoft.com/office/drawing/2014/main" id="{98A93642-CD71-5B00-63CB-C327B4418834}"/>
+                </a:ext>
+              </a:extLst>
+            </p:cNvPr>
+            <p:cNvSpPr/>
+            <p:nvPr/>
+          </p:nvSpPr>
+          <p:spPr>
+            <a:xfrm>
+              <a:off x="2622430" y="3457512"/>
+              <a:ext cx="1923691" cy="1528556"/>
+            </a:xfrm>
+            <a:prstGeom prst="rect">
+              <a:avLst/>
+            </a:prstGeom>
+            <a:noFill/>
+            <a:ln w="22225">
+              <a:solidFill>
+                <a:schemeClr val="accent4">
+                  <a:lumMod val="75000"/>
+                </a:schemeClr>
+              </a:solidFill>
+              <a:prstDash val="dash"/>
+            </a:ln>
+          </p:spPr>
+          <p:style>
+            <a:lnRef idx="2">
+              <a:schemeClr val="accent1">
+                <a:shade val="50000"/>
+              </a:schemeClr>
+            </a:lnRef>
+            <a:fillRef idx="1">
+              <a:schemeClr val="accent1"/>
+            </a:fillRef>
+            <a:effectRef idx="0">
+              <a:schemeClr val="accent1"/>
+            </a:effectRef>
+            <a:fontRef idx="minor">
+              <a:schemeClr val="lt1"/>
+            </a:fontRef>
+          </p:style>
+          <p:txBody>
+            <a:bodyPr rtlCol="0" anchor="ctr"/>
+            <a:lstStyle/>
+            <a:p>
+              <a:pPr marL="0" marR="0" lvl="0" indent="0" algn="ctr" defTabSz="914400" rtl="0" eaLnBrk="1" fontAlgn="auto" latinLnBrk="0" hangingPunct="1">
+                <a:lnSpc>
+                  <a:spcPct val="100000"/>
+                </a:lnSpc>
+                <a:spcBef>
+                  <a:spcPts val="0"/>
+                </a:spcBef>
+                <a:spcAft>
+                  <a:spcPts val="0"/>
+                </a:spcAft>
+                <a:buClrTx/>
+                <a:buSzTx/>
+                <a:buFontTx/>
+                <a:buNone/>
+                <a:tabLst/>
+                <a:defRPr/>
+              </a:pPr>
+              <a:endParaRPr kumimoji="0" lang="en-US" sz="1800" b="0" i="0" u="none" strike="noStrike" kern="1200" cap="none" spc="0" normalizeH="0" baseline="0" noProof="0">
                 <a:ln>
                   <a:noFill/>
                 </a:ln>
                 <a:solidFill>
-                  <a:srgbClr val="FFC000">
-                    <a:lumMod val="75000"/>
-                  </a:srgbClr>
+                  <a:prstClr val="white"/>
                 </a:solidFill>
                 <a:effectLst/>
                 <a:uLnTx/>
                 <a:uFillTx/>
-                <a:latin typeface="Arial Black" panose="020B0A04020102020204" pitchFamily="34" charset="0"/>
+                <a:latin typeface="Calibri" panose="020F0502020204030204"/>
                 <a:ea typeface="+mn-ea"/>
-                <a:cs typeface="Aharoni" panose="02010803020104030203" pitchFamily="2" charset="-79"/>
-              </a:rPr>
-              <a:t>div5</a:t>
-            </a:r>
-          </a:p>
-        </p:txBody>
-      </p:sp>
-      <p:sp>
-        <p:nvSpPr>
-          <p:cNvPr id="23" name="TextBox 22">
-            <a:extLst>
-              <a:ext uri="{FF2B5EF4-FFF2-40B4-BE49-F238E27FC236}">
-                <a16:creationId xmlns:a16="http://schemas.microsoft.com/office/drawing/2014/main" id="{26A4ABC9-F897-3460-3630-F51FEB5D9EAE}"/>
-              </a:ext>
-            </a:extLst>
-          </p:cNvPr>
-          <p:cNvSpPr txBox="1"/>
-          <p:nvPr/>
-        </p:nvSpPr>
-        <p:spPr>
-          <a:xfrm>
-            <a:off x="3572225" y="3792431"/>
-            <a:ext cx="728425" cy="369332"/>
-          </a:xfrm>
-          <a:prstGeom prst="rect">
-            <a:avLst/>
-          </a:prstGeom>
-          <a:solidFill>
-            <a:schemeClr val="bg1"/>
-          </a:solidFill>
-        </p:spPr>
-        <p:txBody>
-          <a:bodyPr wrap="square" rtlCol="0">
-            <a:spAutoFit/>
-          </a:bodyPr>
-          <a:lstStyle/>
-          <a:p>
-            <a:pPr marL="0" marR="0" lvl="0" indent="0" algn="ctr" defTabSz="914400" rtl="0" eaLnBrk="1" fontAlgn="auto" latinLnBrk="0" hangingPunct="1">
-              <a:lnSpc>
-                <a:spcPct val="100000"/>
-              </a:lnSpc>
-              <a:spcBef>
-                <a:spcPts val="0"/>
-              </a:spcBef>
-              <a:spcAft>
-                <a:spcPts val="0"/>
-              </a:spcAft>
-              <a:buClrTx/>
-              <a:buSzTx/>
-              <a:buFontTx/>
-              <a:buNone/>
-              <a:tabLst/>
-              <a:defRPr/>
-            </a:pPr>
-            <a:r>
-              <a:rPr kumimoji="0" lang="en-US" sz="1800" b="0" i="0" u="none" strike="noStrike" kern="1200" cap="none" spc="0" normalizeH="0" baseline="0" noProof="0" dirty="0">
+                <a:cs typeface="+mn-cs"/>
+              </a:endParaRPr>
+            </a:p>
+          </p:txBody>
+        </p:sp>
+        <p:sp>
+          <p:nvSpPr>
+            <p:cNvPr id="18" name="Rectangle 17">
+              <a:extLst>
+                <a:ext uri="{FF2B5EF4-FFF2-40B4-BE49-F238E27FC236}">
+                  <a16:creationId xmlns:a16="http://schemas.microsoft.com/office/drawing/2014/main" id="{6D2F273E-9B95-8321-B147-A0B801B7AC37}"/>
+                </a:ext>
+              </a:extLst>
+            </p:cNvPr>
+            <p:cNvSpPr/>
+            <p:nvPr/>
+          </p:nvSpPr>
+          <p:spPr>
+            <a:xfrm>
+              <a:off x="4546121" y="3443517"/>
+              <a:ext cx="1988287" cy="1528556"/>
+            </a:xfrm>
+            <a:prstGeom prst="rect">
+              <a:avLst/>
+            </a:prstGeom>
+            <a:noFill/>
+            <a:ln w="22225">
+              <a:solidFill>
+                <a:schemeClr val="accent4">
+                  <a:lumMod val="75000"/>
+                </a:schemeClr>
+              </a:solidFill>
+              <a:prstDash val="dash"/>
+            </a:ln>
+          </p:spPr>
+          <p:style>
+            <a:lnRef idx="2">
+              <a:schemeClr val="accent1">
+                <a:shade val="50000"/>
+              </a:schemeClr>
+            </a:lnRef>
+            <a:fillRef idx="1">
+              <a:schemeClr val="accent1"/>
+            </a:fillRef>
+            <a:effectRef idx="0">
+              <a:schemeClr val="accent1"/>
+            </a:effectRef>
+            <a:fontRef idx="minor">
+              <a:schemeClr val="lt1"/>
+            </a:fontRef>
+          </p:style>
+          <p:txBody>
+            <a:bodyPr rtlCol="0" anchor="ctr"/>
+            <a:lstStyle/>
+            <a:p>
+              <a:pPr marL="0" marR="0" lvl="0" indent="0" algn="ctr" defTabSz="914400" rtl="0" eaLnBrk="1" fontAlgn="auto" latinLnBrk="0" hangingPunct="1">
+                <a:lnSpc>
+                  <a:spcPct val="100000"/>
+                </a:lnSpc>
+                <a:spcBef>
+                  <a:spcPts val="0"/>
+                </a:spcBef>
+                <a:spcAft>
+                  <a:spcPts val="0"/>
+                </a:spcAft>
+                <a:buClrTx/>
+                <a:buSzTx/>
+                <a:buFontTx/>
+                <a:buNone/>
+                <a:tabLst/>
+                <a:defRPr/>
+              </a:pPr>
+              <a:endParaRPr kumimoji="0" lang="en-US" sz="1800" b="0" i="0" u="none" strike="noStrike" kern="1200" cap="none" spc="0" normalizeH="0" baseline="0" noProof="0">
                 <a:ln>
                   <a:noFill/>
                 </a:ln>
                 <a:solidFill>
-                  <a:srgbClr val="FFC000">
-                    <a:lumMod val="75000"/>
-                  </a:srgbClr>
+                  <a:prstClr val="white"/>
                 </a:solidFill>
                 <a:effectLst/>
                 <a:uLnTx/>
                 <a:uFillTx/>
-                <a:latin typeface="Arial Black" panose="020B0A04020102020204" pitchFamily="34" charset="0"/>
+                <a:latin typeface="Calibri" panose="020F0502020204030204"/>
                 <a:ea typeface="+mn-ea"/>
-                <a:cs typeface="Aharoni" panose="02010803020104030203" pitchFamily="2" charset="-79"/>
-              </a:rPr>
-              <a:t>div6</a:t>
-            </a:r>
-          </a:p>
-        </p:txBody>
-      </p:sp>
-      <p:sp>
-        <p:nvSpPr>
-          <p:cNvPr id="24" name="TextBox 23">
-            <a:extLst>
-              <a:ext uri="{FF2B5EF4-FFF2-40B4-BE49-F238E27FC236}">
-                <a16:creationId xmlns:a16="http://schemas.microsoft.com/office/drawing/2014/main" id="{293156A1-7B5F-32E0-FD52-D4FCCDBA4574}"/>
-              </a:ext>
-            </a:extLst>
-          </p:cNvPr>
-          <p:cNvSpPr txBox="1"/>
-          <p:nvPr/>
-        </p:nvSpPr>
-        <p:spPr>
-          <a:xfrm>
-            <a:off x="5418601" y="3792431"/>
-            <a:ext cx="728425" cy="369332"/>
-          </a:xfrm>
-          <a:prstGeom prst="rect">
-            <a:avLst/>
-          </a:prstGeom>
-          <a:solidFill>
-            <a:schemeClr val="bg1"/>
-          </a:solidFill>
-        </p:spPr>
-        <p:txBody>
-          <a:bodyPr wrap="square" rtlCol="0">
-            <a:spAutoFit/>
-          </a:bodyPr>
-          <a:lstStyle/>
-          <a:p>
-            <a:pPr marL="0" marR="0" lvl="0" indent="0" algn="ctr" defTabSz="914400" rtl="0" eaLnBrk="1" fontAlgn="auto" latinLnBrk="0" hangingPunct="1">
-              <a:lnSpc>
-                <a:spcPct val="100000"/>
-              </a:lnSpc>
-              <a:spcBef>
-                <a:spcPts val="0"/>
-              </a:spcBef>
-              <a:spcAft>
-                <a:spcPts val="0"/>
-              </a:spcAft>
-              <a:buClrTx/>
-              <a:buSzTx/>
-              <a:buFontTx/>
-              <a:buNone/>
-              <a:tabLst/>
-              <a:defRPr/>
-            </a:pPr>
-            <a:r>
-              <a:rPr kumimoji="0" lang="en-US" sz="1800" b="0" i="0" u="none" strike="noStrike" kern="1200" cap="none" spc="0" normalizeH="0" baseline="0" noProof="0" dirty="0">
+                <a:cs typeface="+mn-cs"/>
+              </a:endParaRPr>
+            </a:p>
+          </p:txBody>
+        </p:sp>
+        <p:sp>
+          <p:nvSpPr>
+            <p:cNvPr id="19" name="Rectangle 18">
+              <a:extLst>
+                <a:ext uri="{FF2B5EF4-FFF2-40B4-BE49-F238E27FC236}">
+                  <a16:creationId xmlns:a16="http://schemas.microsoft.com/office/drawing/2014/main" id="{94CC453B-12C8-2197-8D47-49C2ED8D00D9}"/>
+                </a:ext>
+              </a:extLst>
+            </p:cNvPr>
+            <p:cNvSpPr/>
+            <p:nvPr/>
+          </p:nvSpPr>
+          <p:spPr>
+            <a:xfrm>
+              <a:off x="879139" y="5000062"/>
+              <a:ext cx="1743291" cy="1657401"/>
+            </a:xfrm>
+            <a:prstGeom prst="rect">
+              <a:avLst/>
+            </a:prstGeom>
+            <a:noFill/>
+            <a:ln w="22225">
+              <a:solidFill>
+                <a:schemeClr val="accent4">
+                  <a:lumMod val="75000"/>
+                </a:schemeClr>
+              </a:solidFill>
+              <a:prstDash val="dash"/>
+            </a:ln>
+          </p:spPr>
+          <p:style>
+            <a:lnRef idx="2">
+              <a:schemeClr val="accent1">
+                <a:shade val="50000"/>
+              </a:schemeClr>
+            </a:lnRef>
+            <a:fillRef idx="1">
+              <a:schemeClr val="accent1"/>
+            </a:fillRef>
+            <a:effectRef idx="0">
+              <a:schemeClr val="accent1"/>
+            </a:effectRef>
+            <a:fontRef idx="minor">
+              <a:schemeClr val="lt1"/>
+            </a:fontRef>
+          </p:style>
+          <p:txBody>
+            <a:bodyPr rtlCol="0" anchor="ctr"/>
+            <a:lstStyle/>
+            <a:p>
+              <a:pPr marL="0" marR="0" lvl="0" indent="0" algn="ctr" defTabSz="914400" rtl="0" eaLnBrk="1" fontAlgn="auto" latinLnBrk="0" hangingPunct="1">
+                <a:lnSpc>
+                  <a:spcPct val="100000"/>
+                </a:lnSpc>
+                <a:spcBef>
+                  <a:spcPts val="0"/>
+                </a:spcBef>
+                <a:spcAft>
+                  <a:spcPts val="0"/>
+                </a:spcAft>
+                <a:buClrTx/>
+                <a:buSzTx/>
+                <a:buFontTx/>
+                <a:buNone/>
+                <a:tabLst/>
+                <a:defRPr/>
+              </a:pPr>
+              <a:endParaRPr kumimoji="0" lang="en-US" sz="1800" b="0" i="0" u="none" strike="noStrike" kern="1200" cap="none" spc="0" normalizeH="0" baseline="0" noProof="0">
                 <a:ln>
                   <a:noFill/>
                 </a:ln>
                 <a:solidFill>
-                  <a:srgbClr val="FFC000">
-                    <a:lumMod val="75000"/>
-                  </a:srgbClr>
+                  <a:prstClr val="white"/>
                 </a:solidFill>
                 <a:effectLst/>
                 <a:uLnTx/>
                 <a:uFillTx/>
-                <a:latin typeface="Arial Black" panose="020B0A04020102020204" pitchFamily="34" charset="0"/>
+                <a:latin typeface="Calibri" panose="020F0502020204030204"/>
                 <a:ea typeface="+mn-ea"/>
-                <a:cs typeface="Aharoni" panose="02010803020104030203" pitchFamily="2" charset="-79"/>
-              </a:rPr>
-              <a:t>div7</a:t>
-            </a:r>
-          </a:p>
-        </p:txBody>
-      </p:sp>
-      <p:sp>
-        <p:nvSpPr>
-          <p:cNvPr id="25" name="TextBox 24">
-            <a:extLst>
-              <a:ext uri="{FF2B5EF4-FFF2-40B4-BE49-F238E27FC236}">
-                <a16:creationId xmlns:a16="http://schemas.microsoft.com/office/drawing/2014/main" id="{143D6F10-714F-6369-9219-894E341B06BB}"/>
-              </a:ext>
-            </a:extLst>
-          </p:cNvPr>
-          <p:cNvSpPr txBox="1"/>
-          <p:nvPr/>
-        </p:nvSpPr>
-        <p:spPr>
-          <a:xfrm>
-            <a:off x="1291466" y="5326888"/>
-            <a:ext cx="728425" cy="369332"/>
-          </a:xfrm>
-          <a:prstGeom prst="rect">
-            <a:avLst/>
-          </a:prstGeom>
-          <a:noFill/>
-        </p:spPr>
-        <p:txBody>
-          <a:bodyPr wrap="square" rtlCol="0">
-            <a:spAutoFit/>
-          </a:bodyPr>
-          <a:lstStyle/>
-          <a:p>
-            <a:pPr marL="0" marR="0" lvl="0" indent="0" algn="ctr" defTabSz="914400" rtl="0" eaLnBrk="1" fontAlgn="auto" latinLnBrk="0" hangingPunct="1">
-              <a:lnSpc>
-                <a:spcPct val="100000"/>
-              </a:lnSpc>
-              <a:spcBef>
-                <a:spcPts val="0"/>
-              </a:spcBef>
-              <a:spcAft>
-                <a:spcPts val="0"/>
-              </a:spcAft>
-              <a:buClrTx/>
-              <a:buSzTx/>
-              <a:buFontTx/>
-              <a:buNone/>
-              <a:tabLst/>
-              <a:defRPr/>
-            </a:pPr>
-            <a:r>
-              <a:rPr kumimoji="0" lang="en-US" sz="1800" b="0" i="0" u="none" strike="noStrike" kern="1200" cap="none" spc="0" normalizeH="0" baseline="0" noProof="0" dirty="0">
+                <a:cs typeface="+mn-cs"/>
+              </a:endParaRPr>
+            </a:p>
+          </p:txBody>
+        </p:sp>
+        <p:sp>
+          <p:nvSpPr>
+            <p:cNvPr id="20" name="Rectangle 19">
+              <a:extLst>
+                <a:ext uri="{FF2B5EF4-FFF2-40B4-BE49-F238E27FC236}">
+                  <a16:creationId xmlns:a16="http://schemas.microsoft.com/office/drawing/2014/main" id="{43130FB6-9DBE-4A44-7FEA-F0D64BF1E981}"/>
+                </a:ext>
+              </a:extLst>
+            </p:cNvPr>
+            <p:cNvSpPr/>
+            <p:nvPr/>
+          </p:nvSpPr>
+          <p:spPr>
+            <a:xfrm>
+              <a:off x="2622430" y="5000062"/>
+              <a:ext cx="3911978" cy="1678544"/>
+            </a:xfrm>
+            <a:prstGeom prst="rect">
+              <a:avLst/>
+            </a:prstGeom>
+            <a:noFill/>
+            <a:ln w="22225">
+              <a:solidFill>
+                <a:schemeClr val="accent4">
+                  <a:lumMod val="75000"/>
+                </a:schemeClr>
+              </a:solidFill>
+              <a:prstDash val="dash"/>
+            </a:ln>
+          </p:spPr>
+          <p:style>
+            <a:lnRef idx="2">
+              <a:schemeClr val="accent1">
+                <a:shade val="50000"/>
+              </a:schemeClr>
+            </a:lnRef>
+            <a:fillRef idx="1">
+              <a:schemeClr val="accent1"/>
+            </a:fillRef>
+            <a:effectRef idx="0">
+              <a:schemeClr val="accent1"/>
+            </a:effectRef>
+            <a:fontRef idx="minor">
+              <a:schemeClr val="lt1"/>
+            </a:fontRef>
+          </p:style>
+          <p:txBody>
+            <a:bodyPr rtlCol="0" anchor="ctr"/>
+            <a:lstStyle/>
+            <a:p>
+              <a:pPr marL="0" marR="0" lvl="0" indent="0" algn="ctr" defTabSz="914400" rtl="0" eaLnBrk="1" fontAlgn="auto" latinLnBrk="0" hangingPunct="1">
+                <a:lnSpc>
+                  <a:spcPct val="100000"/>
+                </a:lnSpc>
+                <a:spcBef>
+                  <a:spcPts val="0"/>
+                </a:spcBef>
+                <a:spcAft>
+                  <a:spcPts val="0"/>
+                </a:spcAft>
+                <a:buClrTx/>
+                <a:buSzTx/>
+                <a:buFontTx/>
+                <a:buNone/>
+                <a:tabLst/>
+                <a:defRPr/>
+              </a:pPr>
+              <a:endParaRPr kumimoji="0" lang="en-US" sz="1800" b="0" i="0" u="none" strike="noStrike" kern="1200" cap="none" spc="0" normalizeH="0" baseline="0" noProof="0">
                 <a:ln>
                   <a:noFill/>
                 </a:ln>
                 <a:solidFill>
-                  <a:srgbClr val="FFC000">
-                    <a:lumMod val="75000"/>
-                  </a:srgbClr>
+                  <a:prstClr val="white"/>
                 </a:solidFill>
                 <a:effectLst/>
                 <a:uLnTx/>
                 <a:uFillTx/>
-                <a:latin typeface="Arial Black" panose="020B0A04020102020204" pitchFamily="34" charset="0"/>
+                <a:latin typeface="Calibri" panose="020F0502020204030204"/>
                 <a:ea typeface="+mn-ea"/>
-                <a:cs typeface="Aharoni" panose="02010803020104030203" pitchFamily="2" charset="-79"/>
-              </a:rPr>
-              <a:t>div8</a:t>
-            </a:r>
-          </a:p>
-        </p:txBody>
-      </p:sp>
-      <p:sp>
-        <p:nvSpPr>
-          <p:cNvPr id="26" name="TextBox 25">
-            <a:extLst>
-              <a:ext uri="{FF2B5EF4-FFF2-40B4-BE49-F238E27FC236}">
-                <a16:creationId xmlns:a16="http://schemas.microsoft.com/office/drawing/2014/main" id="{9A80A04C-8CD6-62F7-435D-CCFCC6E0E1A0}"/>
-              </a:ext>
-            </a:extLst>
-          </p:cNvPr>
-          <p:cNvSpPr txBox="1"/>
-          <p:nvPr/>
-        </p:nvSpPr>
-        <p:spPr>
-          <a:xfrm>
-            <a:off x="5532048" y="5326888"/>
-            <a:ext cx="728425" cy="369332"/>
-          </a:xfrm>
-          <a:prstGeom prst="rect">
-            <a:avLst/>
-          </a:prstGeom>
-          <a:noFill/>
-        </p:spPr>
-        <p:txBody>
-          <a:bodyPr wrap="square" rtlCol="0">
-            <a:spAutoFit/>
-          </a:bodyPr>
-          <a:lstStyle/>
-          <a:p>
-            <a:pPr marL="0" marR="0" lvl="0" indent="0" algn="ctr" defTabSz="914400" rtl="0" eaLnBrk="1" fontAlgn="auto" latinLnBrk="0" hangingPunct="1">
-              <a:lnSpc>
-                <a:spcPct val="100000"/>
-              </a:lnSpc>
-              <a:spcBef>
-                <a:spcPts val="0"/>
-              </a:spcBef>
-              <a:spcAft>
-                <a:spcPts val="0"/>
-              </a:spcAft>
-              <a:buClrTx/>
-              <a:buSzTx/>
-              <a:buFontTx/>
-              <a:buNone/>
-              <a:tabLst/>
-              <a:defRPr/>
-            </a:pPr>
-            <a:r>
-              <a:rPr kumimoji="0" lang="en-US" sz="1800" b="0" i="0" u="none" strike="noStrike" kern="1200" cap="none" spc="0" normalizeH="0" baseline="0" noProof="0" dirty="0">
-                <a:ln>
-                  <a:noFill/>
-                </a:ln>
-                <a:solidFill>
-                  <a:srgbClr val="FFC000">
-                    <a:lumMod val="75000"/>
-                  </a:srgbClr>
-                </a:solidFill>
-                <a:effectLst/>
-                <a:uLnTx/>
-                <a:uFillTx/>
-                <a:latin typeface="Arial Black" panose="020B0A04020102020204" pitchFamily="34" charset="0"/>
-                <a:ea typeface="+mn-ea"/>
-                <a:cs typeface="Aharoni" panose="02010803020104030203" pitchFamily="2" charset="-79"/>
-              </a:rPr>
-              <a:t>div9</a:t>
-            </a:r>
-          </a:p>
-        </p:txBody>
-      </p:sp>
+                <a:cs typeface="+mn-cs"/>
+              </a:endParaRPr>
+            </a:p>
+          </p:txBody>
+        </p:sp>
+        <p:sp>
+          <p:nvSpPr>
+            <p:cNvPr id="21" name="TextBox 20">
+              <a:extLst>
+                <a:ext uri="{FF2B5EF4-FFF2-40B4-BE49-F238E27FC236}">
+                  <a16:creationId xmlns:a16="http://schemas.microsoft.com/office/drawing/2014/main" id="{2AB2F5F9-FAEA-E179-9FFC-BE13113BF911}"/>
+                </a:ext>
+              </a:extLst>
+            </p:cNvPr>
+            <p:cNvSpPr txBox="1"/>
+            <p:nvPr/>
+          </p:nvSpPr>
+          <p:spPr>
+            <a:xfrm>
+              <a:off x="1351885" y="2226792"/>
+              <a:ext cx="728425" cy="369332"/>
+            </a:xfrm>
+            <a:prstGeom prst="rect">
+              <a:avLst/>
+            </a:prstGeom>
+            <a:noFill/>
+          </p:spPr>
+          <p:txBody>
+            <a:bodyPr wrap="square" rtlCol="0">
+              <a:spAutoFit/>
+            </a:bodyPr>
+            <a:lstStyle/>
+            <a:p>
+              <a:pPr marL="0" marR="0" lvl="0" indent="0" algn="ctr" defTabSz="914400" rtl="0" eaLnBrk="1" fontAlgn="auto" latinLnBrk="0" hangingPunct="1">
+                <a:lnSpc>
+                  <a:spcPct val="100000"/>
+                </a:lnSpc>
+                <a:spcBef>
+                  <a:spcPts val="0"/>
+                </a:spcBef>
+                <a:spcAft>
+                  <a:spcPts val="0"/>
+                </a:spcAft>
+                <a:buClrTx/>
+                <a:buSzTx/>
+                <a:buFontTx/>
+                <a:buNone/>
+                <a:tabLst/>
+                <a:defRPr/>
+              </a:pPr>
+              <a:r>
+                <a:rPr kumimoji="0" lang="en-US" sz="1800" b="0" i="0" u="none" strike="noStrike" kern="1200" cap="none" spc="0" normalizeH="0" baseline="0" noProof="0" dirty="0">
+                  <a:ln>
+                    <a:noFill/>
+                  </a:ln>
+                  <a:solidFill>
+                    <a:srgbClr val="FFC000">
+                      <a:lumMod val="75000"/>
+                    </a:srgbClr>
+                  </a:solidFill>
+                  <a:effectLst/>
+                  <a:uLnTx/>
+                  <a:uFillTx/>
+                  <a:latin typeface="Arial Black" panose="020B0A04020102020204" pitchFamily="34" charset="0"/>
+                  <a:ea typeface="+mn-ea"/>
+                  <a:cs typeface="Aharoni" panose="02010803020104030203" pitchFamily="2" charset="-79"/>
+                </a:rPr>
+                <a:t>div3</a:t>
+              </a:r>
+            </a:p>
+          </p:txBody>
+        </p:sp>
+        <p:sp>
+          <p:nvSpPr>
+            <p:cNvPr id="22" name="TextBox 21">
+              <a:extLst>
+                <a:ext uri="{FF2B5EF4-FFF2-40B4-BE49-F238E27FC236}">
+                  <a16:creationId xmlns:a16="http://schemas.microsoft.com/office/drawing/2014/main" id="{6C12264B-7A77-8183-A30D-57989421D72C}"/>
+                </a:ext>
+              </a:extLst>
+            </p:cNvPr>
+            <p:cNvSpPr txBox="1"/>
+            <p:nvPr/>
+          </p:nvSpPr>
+          <p:spPr>
+            <a:xfrm>
+              <a:off x="1763366" y="3798332"/>
+              <a:ext cx="728425" cy="369332"/>
+            </a:xfrm>
+            <a:prstGeom prst="rect">
+              <a:avLst/>
+            </a:prstGeom>
+            <a:solidFill>
+              <a:schemeClr val="bg1"/>
+            </a:solidFill>
+          </p:spPr>
+          <p:txBody>
+            <a:bodyPr wrap="square" rtlCol="0">
+              <a:spAutoFit/>
+            </a:bodyPr>
+            <a:lstStyle/>
+            <a:p>
+              <a:pPr marL="0" marR="0" lvl="0" indent="0" algn="ctr" defTabSz="914400" rtl="0" eaLnBrk="1" fontAlgn="auto" latinLnBrk="0" hangingPunct="1">
+                <a:lnSpc>
+                  <a:spcPct val="100000"/>
+                </a:lnSpc>
+                <a:spcBef>
+                  <a:spcPts val="0"/>
+                </a:spcBef>
+                <a:spcAft>
+                  <a:spcPts val="0"/>
+                </a:spcAft>
+                <a:buClrTx/>
+                <a:buSzTx/>
+                <a:buFontTx/>
+                <a:buNone/>
+                <a:tabLst/>
+                <a:defRPr/>
+              </a:pPr>
+              <a:r>
+                <a:rPr kumimoji="0" lang="en-US" sz="1800" b="0" i="0" u="none" strike="noStrike" kern="1200" cap="none" spc="0" normalizeH="0" baseline="0" noProof="0" dirty="0">
+                  <a:ln>
+                    <a:noFill/>
+                  </a:ln>
+                  <a:solidFill>
+                    <a:srgbClr val="FFC000">
+                      <a:lumMod val="75000"/>
+                    </a:srgbClr>
+                  </a:solidFill>
+                  <a:effectLst/>
+                  <a:uLnTx/>
+                  <a:uFillTx/>
+                  <a:latin typeface="Arial Black" panose="020B0A04020102020204" pitchFamily="34" charset="0"/>
+                  <a:ea typeface="+mn-ea"/>
+                  <a:cs typeface="Aharoni" panose="02010803020104030203" pitchFamily="2" charset="-79"/>
+                </a:rPr>
+                <a:t>div5</a:t>
+              </a:r>
+            </a:p>
+          </p:txBody>
+        </p:sp>
+        <p:sp>
+          <p:nvSpPr>
+            <p:cNvPr id="23" name="TextBox 22">
+              <a:extLst>
+                <a:ext uri="{FF2B5EF4-FFF2-40B4-BE49-F238E27FC236}">
+                  <a16:creationId xmlns:a16="http://schemas.microsoft.com/office/drawing/2014/main" id="{26A4ABC9-F897-3460-3630-F51FEB5D9EAE}"/>
+                </a:ext>
+              </a:extLst>
+            </p:cNvPr>
+            <p:cNvSpPr txBox="1"/>
+            <p:nvPr/>
+          </p:nvSpPr>
+          <p:spPr>
+            <a:xfrm>
+              <a:off x="3572225" y="3792431"/>
+              <a:ext cx="728425" cy="369332"/>
+            </a:xfrm>
+            <a:prstGeom prst="rect">
+              <a:avLst/>
+            </a:prstGeom>
+            <a:solidFill>
+              <a:schemeClr val="bg1"/>
+            </a:solidFill>
+          </p:spPr>
+          <p:txBody>
+            <a:bodyPr wrap="square" rtlCol="0">
+              <a:spAutoFit/>
+            </a:bodyPr>
+            <a:lstStyle/>
+            <a:p>
+              <a:pPr marL="0" marR="0" lvl="0" indent="0" algn="ctr" defTabSz="914400" rtl="0" eaLnBrk="1" fontAlgn="auto" latinLnBrk="0" hangingPunct="1">
+                <a:lnSpc>
+                  <a:spcPct val="100000"/>
+                </a:lnSpc>
+                <a:spcBef>
+                  <a:spcPts val="0"/>
+                </a:spcBef>
+                <a:spcAft>
+                  <a:spcPts val="0"/>
+                </a:spcAft>
+                <a:buClrTx/>
+                <a:buSzTx/>
+                <a:buFontTx/>
+                <a:buNone/>
+                <a:tabLst/>
+                <a:defRPr/>
+              </a:pPr>
+              <a:r>
+                <a:rPr kumimoji="0" lang="en-US" sz="1800" b="0" i="0" u="none" strike="noStrike" kern="1200" cap="none" spc="0" normalizeH="0" baseline="0" noProof="0" dirty="0">
+                  <a:ln>
+                    <a:noFill/>
+                  </a:ln>
+                  <a:solidFill>
+                    <a:srgbClr val="FFC000">
+                      <a:lumMod val="75000"/>
+                    </a:srgbClr>
+                  </a:solidFill>
+                  <a:effectLst/>
+                  <a:uLnTx/>
+                  <a:uFillTx/>
+                  <a:latin typeface="Arial Black" panose="020B0A04020102020204" pitchFamily="34" charset="0"/>
+                  <a:ea typeface="+mn-ea"/>
+                  <a:cs typeface="Aharoni" panose="02010803020104030203" pitchFamily="2" charset="-79"/>
+                </a:rPr>
+                <a:t>div6</a:t>
+              </a:r>
+            </a:p>
+          </p:txBody>
+        </p:sp>
+        <p:sp>
+          <p:nvSpPr>
+            <p:cNvPr id="24" name="TextBox 23">
+              <a:extLst>
+                <a:ext uri="{FF2B5EF4-FFF2-40B4-BE49-F238E27FC236}">
+                  <a16:creationId xmlns:a16="http://schemas.microsoft.com/office/drawing/2014/main" id="{293156A1-7B5F-32E0-FD52-D4FCCDBA4574}"/>
+                </a:ext>
+              </a:extLst>
+            </p:cNvPr>
+            <p:cNvSpPr txBox="1"/>
+            <p:nvPr/>
+          </p:nvSpPr>
+          <p:spPr>
+            <a:xfrm>
+              <a:off x="5418601" y="3792431"/>
+              <a:ext cx="728425" cy="369332"/>
+            </a:xfrm>
+            <a:prstGeom prst="rect">
+              <a:avLst/>
+            </a:prstGeom>
+            <a:solidFill>
+              <a:schemeClr val="bg1"/>
+            </a:solidFill>
+          </p:spPr>
+          <p:txBody>
+            <a:bodyPr wrap="square" rtlCol="0">
+              <a:spAutoFit/>
+            </a:bodyPr>
+            <a:lstStyle/>
+            <a:p>
+              <a:pPr marL="0" marR="0" lvl="0" indent="0" algn="ctr" defTabSz="914400" rtl="0" eaLnBrk="1" fontAlgn="auto" latinLnBrk="0" hangingPunct="1">
+                <a:lnSpc>
+                  <a:spcPct val="100000"/>
+                </a:lnSpc>
+                <a:spcBef>
+                  <a:spcPts val="0"/>
+                </a:spcBef>
+                <a:spcAft>
+                  <a:spcPts val="0"/>
+                </a:spcAft>
+                <a:buClrTx/>
+                <a:buSzTx/>
+                <a:buFontTx/>
+                <a:buNone/>
+                <a:tabLst/>
+                <a:defRPr/>
+              </a:pPr>
+              <a:r>
+                <a:rPr kumimoji="0" lang="en-US" sz="1800" b="0" i="0" u="none" strike="noStrike" kern="1200" cap="none" spc="0" normalizeH="0" baseline="0" noProof="0" dirty="0">
+                  <a:ln>
+                    <a:noFill/>
+                  </a:ln>
+                  <a:solidFill>
+                    <a:srgbClr val="FFC000">
+                      <a:lumMod val="75000"/>
+                    </a:srgbClr>
+                  </a:solidFill>
+                  <a:effectLst/>
+                  <a:uLnTx/>
+                  <a:uFillTx/>
+                  <a:latin typeface="Arial Black" panose="020B0A04020102020204" pitchFamily="34" charset="0"/>
+                  <a:ea typeface="+mn-ea"/>
+                  <a:cs typeface="Aharoni" panose="02010803020104030203" pitchFamily="2" charset="-79"/>
+                </a:rPr>
+                <a:t>div7</a:t>
+              </a:r>
+            </a:p>
+          </p:txBody>
+        </p:sp>
+        <p:sp>
+          <p:nvSpPr>
+            <p:cNvPr id="25" name="TextBox 24">
+              <a:extLst>
+                <a:ext uri="{FF2B5EF4-FFF2-40B4-BE49-F238E27FC236}">
+                  <a16:creationId xmlns:a16="http://schemas.microsoft.com/office/drawing/2014/main" id="{143D6F10-714F-6369-9219-894E341B06BB}"/>
+                </a:ext>
+              </a:extLst>
+            </p:cNvPr>
+            <p:cNvSpPr txBox="1"/>
+            <p:nvPr/>
+          </p:nvSpPr>
+          <p:spPr>
+            <a:xfrm>
+              <a:off x="1291466" y="5326888"/>
+              <a:ext cx="728425" cy="369332"/>
+            </a:xfrm>
+            <a:prstGeom prst="rect">
+              <a:avLst/>
+            </a:prstGeom>
+            <a:noFill/>
+          </p:spPr>
+          <p:txBody>
+            <a:bodyPr wrap="square" rtlCol="0">
+              <a:spAutoFit/>
+            </a:bodyPr>
+            <a:lstStyle/>
+            <a:p>
+              <a:pPr marL="0" marR="0" lvl="0" indent="0" algn="ctr" defTabSz="914400" rtl="0" eaLnBrk="1" fontAlgn="auto" latinLnBrk="0" hangingPunct="1">
+                <a:lnSpc>
+                  <a:spcPct val="100000"/>
+                </a:lnSpc>
+                <a:spcBef>
+                  <a:spcPts val="0"/>
+                </a:spcBef>
+                <a:spcAft>
+                  <a:spcPts val="0"/>
+                </a:spcAft>
+                <a:buClrTx/>
+                <a:buSzTx/>
+                <a:buFontTx/>
+                <a:buNone/>
+                <a:tabLst/>
+                <a:defRPr/>
+              </a:pPr>
+              <a:r>
+                <a:rPr kumimoji="0" lang="en-US" sz="1800" b="0" i="0" u="none" strike="noStrike" kern="1200" cap="none" spc="0" normalizeH="0" baseline="0" noProof="0" dirty="0">
+                  <a:ln>
+                    <a:noFill/>
+                  </a:ln>
+                  <a:solidFill>
+                    <a:srgbClr val="FFC000">
+                      <a:lumMod val="75000"/>
+                    </a:srgbClr>
+                  </a:solidFill>
+                  <a:effectLst/>
+                  <a:uLnTx/>
+                  <a:uFillTx/>
+                  <a:latin typeface="Arial Black" panose="020B0A04020102020204" pitchFamily="34" charset="0"/>
+                  <a:ea typeface="+mn-ea"/>
+                  <a:cs typeface="Aharoni" panose="02010803020104030203" pitchFamily="2" charset="-79"/>
+                </a:rPr>
+                <a:t>div8</a:t>
+              </a:r>
+            </a:p>
+          </p:txBody>
+        </p:sp>
+        <p:sp>
+          <p:nvSpPr>
+            <p:cNvPr id="26" name="TextBox 25">
+              <a:extLst>
+                <a:ext uri="{FF2B5EF4-FFF2-40B4-BE49-F238E27FC236}">
+                  <a16:creationId xmlns:a16="http://schemas.microsoft.com/office/drawing/2014/main" id="{9A80A04C-8CD6-62F7-435D-CCFCC6E0E1A0}"/>
+                </a:ext>
+              </a:extLst>
+            </p:cNvPr>
+            <p:cNvSpPr txBox="1"/>
+            <p:nvPr/>
+          </p:nvSpPr>
+          <p:spPr>
+            <a:xfrm>
+              <a:off x="5532048" y="5326888"/>
+              <a:ext cx="728425" cy="369332"/>
+            </a:xfrm>
+            <a:prstGeom prst="rect">
+              <a:avLst/>
+            </a:prstGeom>
+            <a:noFill/>
+          </p:spPr>
+          <p:txBody>
+            <a:bodyPr wrap="square" rtlCol="0">
+              <a:spAutoFit/>
+            </a:bodyPr>
+            <a:lstStyle/>
+            <a:p>
+              <a:pPr marL="0" marR="0" lvl="0" indent="0" algn="ctr" defTabSz="914400" rtl="0" eaLnBrk="1" fontAlgn="auto" latinLnBrk="0" hangingPunct="1">
+                <a:lnSpc>
+                  <a:spcPct val="100000"/>
+                </a:lnSpc>
+                <a:spcBef>
+                  <a:spcPts val="0"/>
+                </a:spcBef>
+                <a:spcAft>
+                  <a:spcPts val="0"/>
+                </a:spcAft>
+                <a:buClrTx/>
+                <a:buSzTx/>
+                <a:buFontTx/>
+                <a:buNone/>
+                <a:tabLst/>
+                <a:defRPr/>
+              </a:pPr>
+              <a:r>
+                <a:rPr kumimoji="0" lang="en-US" sz="1800" b="0" i="0" u="none" strike="noStrike" kern="1200" cap="none" spc="0" normalizeH="0" baseline="0" noProof="0" dirty="0">
+                  <a:ln>
+                    <a:noFill/>
+                  </a:ln>
+                  <a:solidFill>
+                    <a:srgbClr val="FFC000">
+                      <a:lumMod val="75000"/>
+                    </a:srgbClr>
+                  </a:solidFill>
+                  <a:effectLst/>
+                  <a:uLnTx/>
+                  <a:uFillTx/>
+                  <a:latin typeface="Arial Black" panose="020B0A04020102020204" pitchFamily="34" charset="0"/>
+                  <a:ea typeface="+mn-ea"/>
+                  <a:cs typeface="Aharoni" panose="02010803020104030203" pitchFamily="2" charset="-79"/>
+                </a:rPr>
+                <a:t>div9</a:t>
+              </a:r>
+            </a:p>
+          </p:txBody>
+        </p:sp>
+      </p:grpSp>
       <p:sp>
         <p:nvSpPr>
           <p:cNvPr id="32" name="Rectangle 31">
@@ -24235,626 +24256,647 @@
           <a:chExt cx="0" cy="0"/>
         </a:xfrm>
       </p:grpSpPr>
-      <p:sp>
-        <p:nvSpPr>
-          <p:cNvPr id="3" name="TextBox 2">
-            <a:extLst>
-              <a:ext uri="{FF2B5EF4-FFF2-40B4-BE49-F238E27FC236}">
-                <a16:creationId xmlns:a16="http://schemas.microsoft.com/office/drawing/2014/main" id="{F8A8CBEB-D159-DAFD-6FFA-BBA30A719DBB}"/>
-              </a:ext>
-            </a:extLst>
-          </p:cNvPr>
-          <p:cNvSpPr txBox="1"/>
+      <p:grpSp>
+        <p:nvGrpSpPr>
+          <p:cNvPr id="2" name="Group 1">
+            <a:extLst>
+              <a:ext uri="{FF2B5EF4-FFF2-40B4-BE49-F238E27FC236}">
+                <a16:creationId xmlns:a16="http://schemas.microsoft.com/office/drawing/2014/main" id="{32D86D60-5FB5-909D-76F7-9ED6A6D749BA}"/>
+              </a:ext>
+            </a:extLst>
+          </p:cNvPr>
+          <p:cNvGrpSpPr/>
           <p:nvPr/>
-        </p:nvSpPr>
-        <p:spPr>
+        </p:nvGrpSpPr>
+        <p:grpSpPr>
           <a:xfrm>
             <a:off x="1125773" y="1845449"/>
-            <a:ext cx="6094674" cy="4647426"/>
+            <a:ext cx="9608489" cy="4647426"/>
+            <a:chOff x="1125773" y="1845449"/>
+            <a:chExt cx="9608489" cy="4647426"/>
           </a:xfrm>
-          <a:prstGeom prst="rect">
-            <a:avLst/>
-          </a:prstGeom>
-          <a:noFill/>
-        </p:spPr>
-        <p:txBody>
-          <a:bodyPr wrap="square">
-            <a:spAutoFit/>
-          </a:bodyPr>
-          <a:lstStyle/>
-          <a:p>
-            <a:r>
-              <a:rPr lang="en-US" sz="1600" dirty="0">
+        </p:grpSpPr>
+        <p:sp>
+          <p:nvSpPr>
+            <p:cNvPr id="3" name="TextBox 2">
+              <a:extLst>
+                <a:ext uri="{FF2B5EF4-FFF2-40B4-BE49-F238E27FC236}">
+                  <a16:creationId xmlns:a16="http://schemas.microsoft.com/office/drawing/2014/main" id="{F8A8CBEB-D159-DAFD-6FFA-BBA30A719DBB}"/>
+                </a:ext>
+              </a:extLst>
+            </p:cNvPr>
+            <p:cNvSpPr txBox="1"/>
+            <p:nvPr/>
+          </p:nvSpPr>
+          <p:spPr>
+            <a:xfrm>
+              <a:off x="1125773" y="1845449"/>
+              <a:ext cx="6094674" cy="4647426"/>
+            </a:xfrm>
+            <a:prstGeom prst="rect">
+              <a:avLst/>
+            </a:prstGeom>
+            <a:noFill/>
+          </p:spPr>
+          <p:txBody>
+            <a:bodyPr wrap="square">
+              <a:spAutoFit/>
+            </a:bodyPr>
+            <a:lstStyle/>
+            <a:p>
+              <a:r>
+                <a:rPr lang="en-US" sz="1600" dirty="0">
+                  <a:latin typeface="Cascadia Code ExtraLight" panose="020B0609020000020004" pitchFamily="49" charset="0"/>
+                  <a:ea typeface="Cascadia Code ExtraLight" panose="020B0609020000020004" pitchFamily="49" charset="0"/>
+                  <a:cs typeface="Cascadia Code ExtraLight" panose="020B0609020000020004" pitchFamily="49" charset="0"/>
+                </a:rPr>
+                <a:t>.parent {</a:t>
+              </a:r>
+            </a:p>
+            <a:p>
+              <a:r>
+                <a:rPr lang="en-US" sz="1600" dirty="0">
+                  <a:latin typeface="Cascadia Code ExtraLight" panose="020B0609020000020004" pitchFamily="49" charset="0"/>
+                  <a:ea typeface="Cascadia Code ExtraLight" panose="020B0609020000020004" pitchFamily="49" charset="0"/>
+                  <a:cs typeface="Cascadia Code ExtraLight" panose="020B0609020000020004" pitchFamily="49" charset="0"/>
+                </a:rPr>
+                <a:t>  display: grid;</a:t>
+              </a:r>
+            </a:p>
+            <a:p>
+              <a:r>
+                <a:rPr lang="en-US" sz="1600" dirty="0">
+                  <a:latin typeface="Cascadia Code ExtraLight" panose="020B0609020000020004" pitchFamily="49" charset="0"/>
+                  <a:ea typeface="Cascadia Code ExtraLight" panose="020B0609020000020004" pitchFamily="49" charset="0"/>
+                  <a:cs typeface="Cascadia Code ExtraLight" panose="020B0609020000020004" pitchFamily="49" charset="0"/>
+                </a:rPr>
+                <a:t>  grid-template-columns: repeat(3, 1fr);</a:t>
+              </a:r>
+            </a:p>
+            <a:p>
+              <a:r>
+                <a:rPr lang="en-US" sz="1600" dirty="0">
+                  <a:latin typeface="Cascadia Code ExtraLight" panose="020B0609020000020004" pitchFamily="49" charset="0"/>
+                  <a:ea typeface="Cascadia Code ExtraLight" panose="020B0609020000020004" pitchFamily="49" charset="0"/>
+                  <a:cs typeface="Cascadia Code ExtraLight" panose="020B0609020000020004" pitchFamily="49" charset="0"/>
+                </a:rPr>
+                <a:t>  grid-template-rows: auto;  </a:t>
+              </a:r>
+            </a:p>
+            <a:p>
+              <a:r>
+                <a:rPr lang="en-US" sz="1600" dirty="0">
+                  <a:latin typeface="Cascadia Code ExtraLight" panose="020B0609020000020004" pitchFamily="49" charset="0"/>
+                  <a:ea typeface="Cascadia Code ExtraLight" panose="020B0609020000020004" pitchFamily="49" charset="0"/>
+                  <a:cs typeface="Cascadia Code ExtraLight" panose="020B0609020000020004" pitchFamily="49" charset="0"/>
+                </a:rPr>
+                <a:t>    grid-column-gap: 20px;</a:t>
+              </a:r>
+            </a:p>
+            <a:p>
+              <a:r>
+                <a:rPr lang="en-US" sz="1600" dirty="0">
+                  <a:latin typeface="Cascadia Code ExtraLight" panose="020B0609020000020004" pitchFamily="49" charset="0"/>
+                  <a:ea typeface="Cascadia Code ExtraLight" panose="020B0609020000020004" pitchFamily="49" charset="0"/>
+                  <a:cs typeface="Cascadia Code ExtraLight" panose="020B0609020000020004" pitchFamily="49" charset="0"/>
+                </a:rPr>
+                <a:t>  grid-row-gap: 10px;</a:t>
+              </a:r>
+            </a:p>
+            <a:p>
+              <a:r>
+                <a:rPr lang="en-US" sz="1600" dirty="0">
+                  <a:latin typeface="Cascadia Code ExtraLight" panose="020B0609020000020004" pitchFamily="49" charset="0"/>
+                  <a:ea typeface="Cascadia Code ExtraLight" panose="020B0609020000020004" pitchFamily="49" charset="0"/>
+                  <a:cs typeface="Cascadia Code ExtraLight" panose="020B0609020000020004" pitchFamily="49" charset="0"/>
+                </a:rPr>
+                <a:t>  grid-template-areas:</a:t>
+              </a:r>
+            </a:p>
+            <a:p>
+              <a:r>
+                <a:rPr lang="en-US" sz="1600" dirty="0">
+                  <a:latin typeface="Cascadia Code ExtraLight" panose="020B0609020000020004" pitchFamily="49" charset="0"/>
+                  <a:ea typeface="Cascadia Code ExtraLight" panose="020B0609020000020004" pitchFamily="49" charset="0"/>
+                  <a:cs typeface="Cascadia Code ExtraLight" panose="020B0609020000020004" pitchFamily="49" charset="0"/>
+                </a:rPr>
+                <a:t>    "a </a:t>
+              </a:r>
+              <a:r>
+                <a:rPr lang="en-US" sz="1600" dirty="0" err="1">
+                  <a:latin typeface="Cascadia Code ExtraLight" panose="020B0609020000020004" pitchFamily="49" charset="0"/>
+                  <a:ea typeface="Cascadia Code ExtraLight" panose="020B0609020000020004" pitchFamily="49" charset="0"/>
+                  <a:cs typeface="Cascadia Code ExtraLight" panose="020B0609020000020004" pitchFamily="49" charset="0"/>
+                </a:rPr>
+                <a:t>a</a:t>
+              </a:r>
+              <a:r>
+                <a:rPr lang="en-US" sz="1600" dirty="0">
+                  <a:latin typeface="Cascadia Code ExtraLight" panose="020B0609020000020004" pitchFamily="49" charset="0"/>
+                  <a:ea typeface="Cascadia Code ExtraLight" panose="020B0609020000020004" pitchFamily="49" charset="0"/>
+                  <a:cs typeface="Cascadia Code ExtraLight" panose="020B0609020000020004" pitchFamily="49" charset="0"/>
+                </a:rPr>
+                <a:t> </a:t>
+              </a:r>
+              <a:r>
+                <a:rPr lang="en-US" sz="1600" dirty="0" err="1">
+                  <a:latin typeface="Cascadia Code ExtraLight" panose="020B0609020000020004" pitchFamily="49" charset="0"/>
+                  <a:ea typeface="Cascadia Code ExtraLight" panose="020B0609020000020004" pitchFamily="49" charset="0"/>
+                  <a:cs typeface="Cascadia Code ExtraLight" panose="020B0609020000020004" pitchFamily="49" charset="0"/>
+                </a:rPr>
+                <a:t>a</a:t>
+              </a:r>
+              <a:r>
+                <a:rPr lang="en-US" sz="1600" dirty="0">
+                  <a:latin typeface="Cascadia Code ExtraLight" panose="020B0609020000020004" pitchFamily="49" charset="0"/>
+                  <a:ea typeface="Cascadia Code ExtraLight" panose="020B0609020000020004" pitchFamily="49" charset="0"/>
+                  <a:cs typeface="Cascadia Code ExtraLight" panose="020B0609020000020004" pitchFamily="49" charset="0"/>
+                </a:rPr>
+                <a:t>"</a:t>
+              </a:r>
+            </a:p>
+            <a:p>
+              <a:r>
+                <a:rPr lang="en-US" sz="1600" dirty="0">
+                  <a:latin typeface="Cascadia Code ExtraLight" panose="020B0609020000020004" pitchFamily="49" charset="0"/>
+                  <a:ea typeface="Cascadia Code ExtraLight" panose="020B0609020000020004" pitchFamily="49" charset="0"/>
+                  <a:cs typeface="Cascadia Code ExtraLight" panose="020B0609020000020004" pitchFamily="49" charset="0"/>
+                </a:rPr>
+                <a:t>    "b </a:t>
+              </a:r>
+              <a:r>
+                <a:rPr lang="en-US" sz="1600" dirty="0" err="1">
+                  <a:latin typeface="Cascadia Code ExtraLight" panose="020B0609020000020004" pitchFamily="49" charset="0"/>
+                  <a:ea typeface="Cascadia Code ExtraLight" panose="020B0609020000020004" pitchFamily="49" charset="0"/>
+                  <a:cs typeface="Cascadia Code ExtraLight" panose="020B0609020000020004" pitchFamily="49" charset="0"/>
+                </a:rPr>
+                <a:t>b</a:t>
+              </a:r>
+              <a:r>
+                <a:rPr lang="en-US" sz="1600" dirty="0">
+                  <a:latin typeface="Cascadia Code ExtraLight" panose="020B0609020000020004" pitchFamily="49" charset="0"/>
+                  <a:ea typeface="Cascadia Code ExtraLight" panose="020B0609020000020004" pitchFamily="49" charset="0"/>
+                  <a:cs typeface="Cascadia Code ExtraLight" panose="020B0609020000020004" pitchFamily="49" charset="0"/>
+                </a:rPr>
+                <a:t> </a:t>
+              </a:r>
+              <a:r>
+                <a:rPr lang="en-US" sz="1600" dirty="0" err="1">
+                  <a:latin typeface="Cascadia Code ExtraLight" panose="020B0609020000020004" pitchFamily="49" charset="0"/>
+                  <a:ea typeface="Cascadia Code ExtraLight" panose="020B0609020000020004" pitchFamily="49" charset="0"/>
+                  <a:cs typeface="Cascadia Code ExtraLight" panose="020B0609020000020004" pitchFamily="49" charset="0"/>
+                </a:rPr>
+                <a:t>b</a:t>
+              </a:r>
+              <a:r>
+                <a:rPr lang="en-US" sz="1600" dirty="0">
+                  <a:latin typeface="Cascadia Code ExtraLight" panose="020B0609020000020004" pitchFamily="49" charset="0"/>
+                  <a:ea typeface="Cascadia Code ExtraLight" panose="020B0609020000020004" pitchFamily="49" charset="0"/>
+                  <a:cs typeface="Cascadia Code ExtraLight" panose="020B0609020000020004" pitchFamily="49" charset="0"/>
+                </a:rPr>
+                <a:t>"</a:t>
+              </a:r>
+            </a:p>
+            <a:p>
+              <a:r>
+                <a:rPr lang="en-US" sz="1600" dirty="0">
+                  <a:latin typeface="Cascadia Code ExtraLight" panose="020B0609020000020004" pitchFamily="49" charset="0"/>
+                  <a:ea typeface="Cascadia Code ExtraLight" panose="020B0609020000020004" pitchFamily="49" charset="0"/>
+                  <a:cs typeface="Cascadia Code ExtraLight" panose="020B0609020000020004" pitchFamily="49" charset="0"/>
+                </a:rPr>
+                <a:t>    "c d </a:t>
+              </a:r>
+              <a:r>
+                <a:rPr lang="en-US" sz="1600" dirty="0" err="1">
+                  <a:latin typeface="Cascadia Code ExtraLight" panose="020B0609020000020004" pitchFamily="49" charset="0"/>
+                  <a:ea typeface="Cascadia Code ExtraLight" panose="020B0609020000020004" pitchFamily="49" charset="0"/>
+                  <a:cs typeface="Cascadia Code ExtraLight" panose="020B0609020000020004" pitchFamily="49" charset="0"/>
+                </a:rPr>
+                <a:t>d</a:t>
+              </a:r>
+              <a:r>
+                <a:rPr lang="en-US" sz="1600" dirty="0">
+                  <a:latin typeface="Cascadia Code ExtraLight" panose="020B0609020000020004" pitchFamily="49" charset="0"/>
+                  <a:ea typeface="Cascadia Code ExtraLight" panose="020B0609020000020004" pitchFamily="49" charset="0"/>
+                  <a:cs typeface="Cascadia Code ExtraLight" panose="020B0609020000020004" pitchFamily="49" charset="0"/>
+                </a:rPr>
+                <a:t>"</a:t>
+              </a:r>
+            </a:p>
+            <a:p>
+              <a:r>
+                <a:rPr lang="en-US" sz="1600" dirty="0">
+                  <a:latin typeface="Cascadia Code ExtraLight" panose="020B0609020000020004" pitchFamily="49" charset="0"/>
+                  <a:ea typeface="Cascadia Code ExtraLight" panose="020B0609020000020004" pitchFamily="49" charset="0"/>
+                  <a:cs typeface="Cascadia Code ExtraLight" panose="020B0609020000020004" pitchFamily="49" charset="0"/>
+                </a:rPr>
+                <a:t>    "e f g" </a:t>
+              </a:r>
+            </a:p>
+            <a:p>
+              <a:r>
+                <a:rPr lang="en-US" sz="1600" dirty="0">
+                  <a:latin typeface="Cascadia Code ExtraLight" panose="020B0609020000020004" pitchFamily="49" charset="0"/>
+                  <a:ea typeface="Cascadia Code ExtraLight" panose="020B0609020000020004" pitchFamily="49" charset="0"/>
+                  <a:cs typeface="Cascadia Code ExtraLight" panose="020B0609020000020004" pitchFamily="49" charset="0"/>
+                </a:rPr>
+                <a:t>    "h </a:t>
+              </a:r>
+              <a:r>
+                <a:rPr lang="en-US" sz="1600" dirty="0" err="1">
+                  <a:latin typeface="Cascadia Code ExtraLight" panose="020B0609020000020004" pitchFamily="49" charset="0"/>
+                  <a:ea typeface="Cascadia Code ExtraLight" panose="020B0609020000020004" pitchFamily="49" charset="0"/>
+                  <a:cs typeface="Cascadia Code ExtraLight" panose="020B0609020000020004" pitchFamily="49" charset="0"/>
+                </a:rPr>
+                <a:t>h</a:t>
+              </a:r>
+              <a:r>
+                <a:rPr lang="en-US" sz="1600" dirty="0">
+                  <a:latin typeface="Cascadia Code ExtraLight" panose="020B0609020000020004" pitchFamily="49" charset="0"/>
+                  <a:ea typeface="Cascadia Code ExtraLight" panose="020B0609020000020004" pitchFamily="49" charset="0"/>
+                  <a:cs typeface="Cascadia Code ExtraLight" panose="020B0609020000020004" pitchFamily="49" charset="0"/>
+                </a:rPr>
+                <a:t> </a:t>
+              </a:r>
+              <a:r>
+                <a:rPr lang="en-US" sz="1600" dirty="0" err="1">
+                  <a:latin typeface="Cascadia Code ExtraLight" panose="020B0609020000020004" pitchFamily="49" charset="0"/>
+                  <a:ea typeface="Cascadia Code ExtraLight" panose="020B0609020000020004" pitchFamily="49" charset="0"/>
+                  <a:cs typeface="Cascadia Code ExtraLight" panose="020B0609020000020004" pitchFamily="49" charset="0"/>
+                </a:rPr>
+                <a:t>h</a:t>
+              </a:r>
+              <a:r>
+                <a:rPr lang="en-US" sz="1600" dirty="0">
+                  <a:latin typeface="Cascadia Code ExtraLight" panose="020B0609020000020004" pitchFamily="49" charset="0"/>
+                  <a:ea typeface="Cascadia Code ExtraLight" panose="020B0609020000020004" pitchFamily="49" charset="0"/>
+                  <a:cs typeface="Cascadia Code ExtraLight" panose="020B0609020000020004" pitchFamily="49" charset="0"/>
+                </a:rPr>
+                <a:t>"</a:t>
+              </a:r>
+            </a:p>
+            <a:p>
+              <a:r>
+                <a:rPr lang="en-US" sz="1600" dirty="0">
+                  <a:latin typeface="Cascadia Code ExtraLight" panose="020B0609020000020004" pitchFamily="49" charset="0"/>
+                  <a:ea typeface="Cascadia Code ExtraLight" panose="020B0609020000020004" pitchFamily="49" charset="0"/>
+                  <a:cs typeface="Cascadia Code ExtraLight" panose="020B0609020000020004" pitchFamily="49" charset="0"/>
+                </a:rPr>
+                <a:t>    "</a:t>
+              </a:r>
+              <a:r>
+                <a:rPr lang="en-US" sz="1600" dirty="0" err="1">
+                  <a:latin typeface="Cascadia Code ExtraLight" panose="020B0609020000020004" pitchFamily="49" charset="0"/>
+                  <a:ea typeface="Cascadia Code ExtraLight" panose="020B0609020000020004" pitchFamily="49" charset="0"/>
+                  <a:cs typeface="Cascadia Code ExtraLight" panose="020B0609020000020004" pitchFamily="49" charset="0"/>
+                </a:rPr>
+                <a:t>i</a:t>
+              </a:r>
+              <a:r>
+                <a:rPr lang="en-US" sz="1600" dirty="0">
+                  <a:latin typeface="Cascadia Code ExtraLight" panose="020B0609020000020004" pitchFamily="49" charset="0"/>
+                  <a:ea typeface="Cascadia Code ExtraLight" panose="020B0609020000020004" pitchFamily="49" charset="0"/>
+                  <a:cs typeface="Cascadia Code ExtraLight" panose="020B0609020000020004" pitchFamily="49" charset="0"/>
+                </a:rPr>
+                <a:t> </a:t>
+              </a:r>
+              <a:r>
+                <a:rPr lang="en-US" sz="1600" dirty="0" err="1">
+                  <a:latin typeface="Cascadia Code ExtraLight" panose="020B0609020000020004" pitchFamily="49" charset="0"/>
+                  <a:ea typeface="Cascadia Code ExtraLight" panose="020B0609020000020004" pitchFamily="49" charset="0"/>
+                  <a:cs typeface="Cascadia Code ExtraLight" panose="020B0609020000020004" pitchFamily="49" charset="0"/>
+                </a:rPr>
+                <a:t>i</a:t>
+              </a:r>
+              <a:r>
+                <a:rPr lang="en-US" sz="1600" dirty="0">
+                  <a:latin typeface="Cascadia Code ExtraLight" panose="020B0609020000020004" pitchFamily="49" charset="0"/>
+                  <a:ea typeface="Cascadia Code ExtraLight" panose="020B0609020000020004" pitchFamily="49" charset="0"/>
+                  <a:cs typeface="Cascadia Code ExtraLight" panose="020B0609020000020004" pitchFamily="49" charset="0"/>
+                </a:rPr>
+                <a:t> </a:t>
+              </a:r>
+              <a:r>
+                <a:rPr lang="en-US" sz="1600" dirty="0" err="1">
+                  <a:latin typeface="Cascadia Code ExtraLight" panose="020B0609020000020004" pitchFamily="49" charset="0"/>
+                  <a:ea typeface="Cascadia Code ExtraLight" panose="020B0609020000020004" pitchFamily="49" charset="0"/>
+                  <a:cs typeface="Cascadia Code ExtraLight" panose="020B0609020000020004" pitchFamily="49" charset="0"/>
+                </a:rPr>
+                <a:t>i</a:t>
+              </a:r>
+              <a:r>
+                <a:rPr lang="en-US" sz="1600" dirty="0">
+                  <a:latin typeface="Cascadia Code ExtraLight" panose="020B0609020000020004" pitchFamily="49" charset="0"/>
+                  <a:ea typeface="Cascadia Code ExtraLight" panose="020B0609020000020004" pitchFamily="49" charset="0"/>
+                  <a:cs typeface="Cascadia Code ExtraLight" panose="020B0609020000020004" pitchFamily="49" charset="0"/>
+                </a:rPr>
+                <a:t>"</a:t>
+              </a:r>
+            </a:p>
+            <a:p>
+              <a:r>
+                <a:rPr lang="en-US" sz="1600" dirty="0">
+                  <a:latin typeface="Cascadia Code ExtraLight" panose="020B0609020000020004" pitchFamily="49" charset="0"/>
+                  <a:ea typeface="Cascadia Code ExtraLight" panose="020B0609020000020004" pitchFamily="49" charset="0"/>
+                  <a:cs typeface="Cascadia Code ExtraLight" panose="020B0609020000020004" pitchFamily="49" charset="0"/>
+                </a:rPr>
+                <a:t>    "j k </a:t>
+              </a:r>
+              <a:r>
+                <a:rPr lang="en-US" sz="1600" dirty="0" err="1">
+                  <a:latin typeface="Cascadia Code ExtraLight" panose="020B0609020000020004" pitchFamily="49" charset="0"/>
+                  <a:ea typeface="Cascadia Code ExtraLight" panose="020B0609020000020004" pitchFamily="49" charset="0"/>
+                  <a:cs typeface="Cascadia Code ExtraLight" panose="020B0609020000020004" pitchFamily="49" charset="0"/>
+                </a:rPr>
+                <a:t>k</a:t>
+              </a:r>
+              <a:r>
+                <a:rPr lang="en-US" sz="1600" dirty="0">
+                  <a:latin typeface="Cascadia Code ExtraLight" panose="020B0609020000020004" pitchFamily="49" charset="0"/>
+                  <a:ea typeface="Cascadia Code ExtraLight" panose="020B0609020000020004" pitchFamily="49" charset="0"/>
+                  <a:cs typeface="Cascadia Code ExtraLight" panose="020B0609020000020004" pitchFamily="49" charset="0"/>
+                </a:rPr>
+                <a:t>"</a:t>
+              </a:r>
+            </a:p>
+            <a:p>
+              <a:r>
+                <a:rPr lang="en-US" sz="1600" dirty="0">
+                  <a:latin typeface="Cascadia Code ExtraLight" panose="020B0609020000020004" pitchFamily="49" charset="0"/>
+                  <a:ea typeface="Cascadia Code ExtraLight" panose="020B0609020000020004" pitchFamily="49" charset="0"/>
+                  <a:cs typeface="Cascadia Code ExtraLight" panose="020B0609020000020004" pitchFamily="49" charset="0"/>
+                </a:rPr>
+                <a:t>    "m o </a:t>
+              </a:r>
+              <a:r>
+                <a:rPr lang="en-US" sz="1600" dirty="0" err="1">
+                  <a:latin typeface="Cascadia Code ExtraLight" panose="020B0609020000020004" pitchFamily="49" charset="0"/>
+                  <a:ea typeface="Cascadia Code ExtraLight" panose="020B0609020000020004" pitchFamily="49" charset="0"/>
+                  <a:cs typeface="Cascadia Code ExtraLight" panose="020B0609020000020004" pitchFamily="49" charset="0"/>
+                </a:rPr>
+                <a:t>o</a:t>
+              </a:r>
+              <a:r>
+                <a:rPr lang="en-US" sz="1600" dirty="0">
+                  <a:latin typeface="Cascadia Code ExtraLight" panose="020B0609020000020004" pitchFamily="49" charset="0"/>
+                  <a:ea typeface="Cascadia Code ExtraLight" panose="020B0609020000020004" pitchFamily="49" charset="0"/>
+                  <a:cs typeface="Cascadia Code ExtraLight" panose="020B0609020000020004" pitchFamily="49" charset="0"/>
+                </a:rPr>
+                <a:t>"</a:t>
+              </a:r>
+            </a:p>
+            <a:p>
+              <a:r>
+                <a:rPr lang="en-US" sz="1600" dirty="0">
+                  <a:latin typeface="Cascadia Code ExtraLight" panose="020B0609020000020004" pitchFamily="49" charset="0"/>
+                  <a:ea typeface="Cascadia Code ExtraLight" panose="020B0609020000020004" pitchFamily="49" charset="0"/>
+                  <a:cs typeface="Cascadia Code ExtraLight" panose="020B0609020000020004" pitchFamily="49" charset="0"/>
+                </a:rPr>
+                <a:t>    "n o </a:t>
+              </a:r>
+              <a:r>
+                <a:rPr lang="en-US" sz="1600" dirty="0" err="1">
+                  <a:latin typeface="Cascadia Code ExtraLight" panose="020B0609020000020004" pitchFamily="49" charset="0"/>
+                  <a:ea typeface="Cascadia Code ExtraLight" panose="020B0609020000020004" pitchFamily="49" charset="0"/>
+                  <a:cs typeface="Cascadia Code ExtraLight" panose="020B0609020000020004" pitchFamily="49" charset="0"/>
+                </a:rPr>
+                <a:t>o</a:t>
+              </a:r>
+              <a:r>
+                <a:rPr lang="en-US" sz="1600" dirty="0">
+                  <a:latin typeface="Cascadia Code ExtraLight" panose="020B0609020000020004" pitchFamily="49" charset="0"/>
+                  <a:ea typeface="Cascadia Code ExtraLight" panose="020B0609020000020004" pitchFamily="49" charset="0"/>
+                  <a:cs typeface="Cascadia Code ExtraLight" panose="020B0609020000020004" pitchFamily="49" charset="0"/>
+                </a:rPr>
+                <a:t>"</a:t>
+              </a:r>
+            </a:p>
+            <a:p>
+              <a:r>
+                <a:rPr lang="en-US" sz="1600" dirty="0">
+                  <a:latin typeface="Cascadia Code ExtraLight" panose="020B0609020000020004" pitchFamily="49" charset="0"/>
+                  <a:ea typeface="Cascadia Code ExtraLight" panose="020B0609020000020004" pitchFamily="49" charset="0"/>
+                  <a:cs typeface="Cascadia Code ExtraLight" panose="020B0609020000020004" pitchFamily="49" charset="0"/>
+                </a:rPr>
+                <a:t>    "p </a:t>
+              </a:r>
+              <a:r>
+                <a:rPr lang="en-US" sz="1600" dirty="0" err="1">
+                  <a:latin typeface="Cascadia Code ExtraLight" panose="020B0609020000020004" pitchFamily="49" charset="0"/>
+                  <a:ea typeface="Cascadia Code ExtraLight" panose="020B0609020000020004" pitchFamily="49" charset="0"/>
+                  <a:cs typeface="Cascadia Code ExtraLight" panose="020B0609020000020004" pitchFamily="49" charset="0"/>
+                </a:rPr>
+                <a:t>p</a:t>
+              </a:r>
+              <a:r>
+                <a:rPr lang="en-US" sz="1600" dirty="0">
+                  <a:latin typeface="Cascadia Code ExtraLight" panose="020B0609020000020004" pitchFamily="49" charset="0"/>
+                  <a:ea typeface="Cascadia Code ExtraLight" panose="020B0609020000020004" pitchFamily="49" charset="0"/>
+                  <a:cs typeface="Cascadia Code ExtraLight" panose="020B0609020000020004" pitchFamily="49" charset="0"/>
+                </a:rPr>
+                <a:t> </a:t>
+              </a:r>
+              <a:r>
+                <a:rPr lang="en-US" sz="1600" dirty="0" err="1">
+                  <a:latin typeface="Cascadia Code ExtraLight" panose="020B0609020000020004" pitchFamily="49" charset="0"/>
+                  <a:ea typeface="Cascadia Code ExtraLight" panose="020B0609020000020004" pitchFamily="49" charset="0"/>
+                  <a:cs typeface="Cascadia Code ExtraLight" panose="020B0609020000020004" pitchFamily="49" charset="0"/>
+                </a:rPr>
+                <a:t>p</a:t>
+              </a:r>
+              <a:r>
+                <a:rPr lang="en-US" sz="1600" dirty="0">
+                  <a:latin typeface="Cascadia Code ExtraLight" panose="020B0609020000020004" pitchFamily="49" charset="0"/>
+                  <a:ea typeface="Cascadia Code ExtraLight" panose="020B0609020000020004" pitchFamily="49" charset="0"/>
+                  <a:cs typeface="Cascadia Code ExtraLight" panose="020B0609020000020004" pitchFamily="49" charset="0"/>
+                </a:rPr>
+                <a:t>";</a:t>
+              </a:r>
+            </a:p>
+            <a:p>
+              <a:r>
+                <a:rPr lang="en-US" sz="1600" dirty="0">
+                  <a:latin typeface="Cascadia Code ExtraLight" panose="020B0609020000020004" pitchFamily="49" charset="0"/>
+                  <a:ea typeface="Cascadia Code ExtraLight" panose="020B0609020000020004" pitchFamily="49" charset="0"/>
+                  <a:cs typeface="Cascadia Code ExtraLight" panose="020B0609020000020004" pitchFamily="49" charset="0"/>
+                </a:rPr>
+                <a:t>}</a:t>
+              </a:r>
+            </a:p>
+          </p:txBody>
+        </p:sp>
+        <p:sp>
+          <p:nvSpPr>
+            <p:cNvPr id="5" name="TextBox 4">
+              <a:extLst>
+                <a:ext uri="{FF2B5EF4-FFF2-40B4-BE49-F238E27FC236}">
+                  <a16:creationId xmlns:a16="http://schemas.microsoft.com/office/drawing/2014/main" id="{0045AB68-41CB-9FE6-8749-2F9A2205B10F}"/>
+                </a:ext>
+              </a:extLst>
+            </p:cNvPr>
+            <p:cNvSpPr txBox="1"/>
+            <p:nvPr/>
+          </p:nvSpPr>
+          <p:spPr>
+            <a:xfrm>
+              <a:off x="7022991" y="1845449"/>
+              <a:ext cx="3711271" cy="3785652"/>
+            </a:xfrm>
+            <a:prstGeom prst="rect">
+              <a:avLst/>
+            </a:prstGeom>
+            <a:noFill/>
+          </p:spPr>
+          <p:txBody>
+            <a:bodyPr wrap="square">
+              <a:spAutoFit/>
+            </a:bodyPr>
+            <a:lstStyle/>
+            <a:p>
+              <a:endParaRPr lang="en-US" sz="1600" dirty="0">
                 <a:latin typeface="Cascadia Code ExtraLight" panose="020B0609020000020004" pitchFamily="49" charset="0"/>
                 <a:ea typeface="Cascadia Code ExtraLight" panose="020B0609020000020004" pitchFamily="49" charset="0"/>
                 <a:cs typeface="Cascadia Code ExtraLight" panose="020B0609020000020004" pitchFamily="49" charset="0"/>
-              </a:rPr>
-              <a:t>.parent {</a:t>
-            </a:r>
-          </a:p>
-          <a:p>
-            <a:r>
-              <a:rPr lang="en-US" sz="1600" dirty="0">
+              </a:endParaRPr>
+            </a:p>
+            <a:p>
+              <a:r>
+                <a:rPr lang="en-US" sz="1600" dirty="0">
+                  <a:latin typeface="Cascadia Code ExtraLight" panose="020B0609020000020004" pitchFamily="49" charset="0"/>
+                  <a:ea typeface="Cascadia Code ExtraLight" panose="020B0609020000020004" pitchFamily="49" charset="0"/>
+                  <a:cs typeface="Cascadia Code ExtraLight" panose="020B0609020000020004" pitchFamily="49" charset="0"/>
+                </a:rPr>
+                <a:t>.div1 { </a:t>
+              </a:r>
+            </a:p>
+            <a:p>
+              <a:r>
+                <a:rPr lang="en-US" sz="1600" dirty="0">
+                  <a:latin typeface="Cascadia Code ExtraLight" panose="020B0609020000020004" pitchFamily="49" charset="0"/>
+                  <a:ea typeface="Cascadia Code ExtraLight" panose="020B0609020000020004" pitchFamily="49" charset="0"/>
+                  <a:cs typeface="Cascadia Code ExtraLight" panose="020B0609020000020004" pitchFamily="49" charset="0"/>
+                </a:rPr>
+                <a:t>  grid-area: a;</a:t>
+              </a:r>
+            </a:p>
+            <a:p>
+              <a:r>
+                <a:rPr lang="en-US" sz="1600" dirty="0">
+                  <a:latin typeface="Cascadia Code ExtraLight" panose="020B0609020000020004" pitchFamily="49" charset="0"/>
+                  <a:ea typeface="Cascadia Code ExtraLight" panose="020B0609020000020004" pitchFamily="49" charset="0"/>
+                  <a:cs typeface="Cascadia Code ExtraLight" panose="020B0609020000020004" pitchFamily="49" charset="0"/>
+                </a:rPr>
+                <a:t>  padding-bottom: 15px;</a:t>
+              </a:r>
+            </a:p>
+            <a:p>
+              <a:r>
+                <a:rPr lang="en-US" sz="1600" dirty="0">
+                  <a:latin typeface="Cascadia Code ExtraLight" panose="020B0609020000020004" pitchFamily="49" charset="0"/>
+                  <a:ea typeface="Cascadia Code ExtraLight" panose="020B0609020000020004" pitchFamily="49" charset="0"/>
+                  <a:cs typeface="Cascadia Code ExtraLight" panose="020B0609020000020004" pitchFamily="49" charset="0"/>
+                </a:rPr>
+                <a:t>}</a:t>
+              </a:r>
+            </a:p>
+            <a:p>
+              <a:endParaRPr lang="en-US" sz="1600" dirty="0">
                 <a:latin typeface="Cascadia Code ExtraLight" panose="020B0609020000020004" pitchFamily="49" charset="0"/>
                 <a:ea typeface="Cascadia Code ExtraLight" panose="020B0609020000020004" pitchFamily="49" charset="0"/>
                 <a:cs typeface="Cascadia Code ExtraLight" panose="020B0609020000020004" pitchFamily="49" charset="0"/>
-              </a:rPr>
-              <a:t>  display: grid;</a:t>
-            </a:r>
-          </a:p>
-          <a:p>
-            <a:r>
-              <a:rPr lang="en-US" sz="1600" dirty="0">
+              </a:endParaRPr>
+            </a:p>
+            <a:p>
+              <a:r>
+                <a:rPr lang="en-US" sz="1600" dirty="0">
+                  <a:latin typeface="Cascadia Code ExtraLight" panose="020B0609020000020004" pitchFamily="49" charset="0"/>
+                  <a:ea typeface="Cascadia Code ExtraLight" panose="020B0609020000020004" pitchFamily="49" charset="0"/>
+                  <a:cs typeface="Cascadia Code ExtraLight" panose="020B0609020000020004" pitchFamily="49" charset="0"/>
+                </a:rPr>
+                <a:t>.div2 { </a:t>
+              </a:r>
+            </a:p>
+            <a:p>
+              <a:r>
+                <a:rPr lang="en-US" sz="1600" dirty="0">
+                  <a:latin typeface="Cascadia Code ExtraLight" panose="020B0609020000020004" pitchFamily="49" charset="0"/>
+                  <a:ea typeface="Cascadia Code ExtraLight" panose="020B0609020000020004" pitchFamily="49" charset="0"/>
+                  <a:cs typeface="Cascadia Code ExtraLight" panose="020B0609020000020004" pitchFamily="49" charset="0"/>
+                </a:rPr>
+                <a:t>    grid-area: b;</a:t>
+              </a:r>
+            </a:p>
+            <a:p>
+              <a:r>
+                <a:rPr lang="en-US" sz="1600" dirty="0">
+                  <a:latin typeface="Cascadia Code ExtraLight" panose="020B0609020000020004" pitchFamily="49" charset="0"/>
+                  <a:ea typeface="Cascadia Code ExtraLight" panose="020B0609020000020004" pitchFamily="49" charset="0"/>
+                  <a:cs typeface="Cascadia Code ExtraLight" panose="020B0609020000020004" pitchFamily="49" charset="0"/>
+                </a:rPr>
+                <a:t>    padding-left: 30px;</a:t>
+              </a:r>
+            </a:p>
+            <a:p>
+              <a:r>
+                <a:rPr lang="en-US" sz="1600" dirty="0">
+                  <a:latin typeface="Cascadia Code ExtraLight" panose="020B0609020000020004" pitchFamily="49" charset="0"/>
+                  <a:ea typeface="Cascadia Code ExtraLight" panose="020B0609020000020004" pitchFamily="49" charset="0"/>
+                  <a:cs typeface="Cascadia Code ExtraLight" panose="020B0609020000020004" pitchFamily="49" charset="0"/>
+                </a:rPr>
+                <a:t>}</a:t>
+              </a:r>
+            </a:p>
+            <a:p>
+              <a:endParaRPr lang="en-US" sz="1600" dirty="0">
                 <a:latin typeface="Cascadia Code ExtraLight" panose="020B0609020000020004" pitchFamily="49" charset="0"/>
                 <a:ea typeface="Cascadia Code ExtraLight" panose="020B0609020000020004" pitchFamily="49" charset="0"/>
                 <a:cs typeface="Cascadia Code ExtraLight" panose="020B0609020000020004" pitchFamily="49" charset="0"/>
-              </a:rPr>
-              <a:t>  grid-template-columns: repeat(3, 1fr);</a:t>
-            </a:r>
-          </a:p>
-          <a:p>
-            <a:r>
-              <a:rPr lang="en-US" sz="1600" dirty="0">
-                <a:latin typeface="Cascadia Code ExtraLight" panose="020B0609020000020004" pitchFamily="49" charset="0"/>
-                <a:ea typeface="Cascadia Code ExtraLight" panose="020B0609020000020004" pitchFamily="49" charset="0"/>
-                <a:cs typeface="Cascadia Code ExtraLight" panose="020B0609020000020004" pitchFamily="49" charset="0"/>
-              </a:rPr>
-              <a:t>  grid-template-rows: auto;  </a:t>
-            </a:r>
-          </a:p>
-          <a:p>
-            <a:r>
-              <a:rPr lang="en-US" sz="1600" dirty="0">
-                <a:latin typeface="Cascadia Code ExtraLight" panose="020B0609020000020004" pitchFamily="49" charset="0"/>
-                <a:ea typeface="Cascadia Code ExtraLight" panose="020B0609020000020004" pitchFamily="49" charset="0"/>
-                <a:cs typeface="Cascadia Code ExtraLight" panose="020B0609020000020004" pitchFamily="49" charset="0"/>
-              </a:rPr>
-              <a:t>    grid-column-gap: 20px;</a:t>
-            </a:r>
-          </a:p>
-          <a:p>
-            <a:r>
-              <a:rPr lang="en-US" sz="1600" dirty="0">
-                <a:latin typeface="Cascadia Code ExtraLight" panose="020B0609020000020004" pitchFamily="49" charset="0"/>
-                <a:ea typeface="Cascadia Code ExtraLight" panose="020B0609020000020004" pitchFamily="49" charset="0"/>
-                <a:cs typeface="Cascadia Code ExtraLight" panose="020B0609020000020004" pitchFamily="49" charset="0"/>
-              </a:rPr>
-              <a:t>  grid-row-gap: 10px;</a:t>
-            </a:r>
-          </a:p>
-          <a:p>
-            <a:r>
-              <a:rPr lang="en-US" sz="1600" dirty="0">
-                <a:latin typeface="Cascadia Code ExtraLight" panose="020B0609020000020004" pitchFamily="49" charset="0"/>
-                <a:ea typeface="Cascadia Code ExtraLight" panose="020B0609020000020004" pitchFamily="49" charset="0"/>
-                <a:cs typeface="Cascadia Code ExtraLight" panose="020B0609020000020004" pitchFamily="49" charset="0"/>
-              </a:rPr>
-              <a:t>  grid-template-areas:</a:t>
-            </a:r>
-          </a:p>
-          <a:p>
-            <a:r>
-              <a:rPr lang="en-US" sz="1600" dirty="0">
-                <a:latin typeface="Cascadia Code ExtraLight" panose="020B0609020000020004" pitchFamily="49" charset="0"/>
-                <a:ea typeface="Cascadia Code ExtraLight" panose="020B0609020000020004" pitchFamily="49" charset="0"/>
-                <a:cs typeface="Cascadia Code ExtraLight" panose="020B0609020000020004" pitchFamily="49" charset="0"/>
-              </a:rPr>
-              <a:t>    "a </a:t>
-            </a:r>
-            <a:r>
-              <a:rPr lang="en-US" sz="1600" dirty="0" err="1">
-                <a:latin typeface="Cascadia Code ExtraLight" panose="020B0609020000020004" pitchFamily="49" charset="0"/>
-                <a:ea typeface="Cascadia Code ExtraLight" panose="020B0609020000020004" pitchFamily="49" charset="0"/>
-                <a:cs typeface="Cascadia Code ExtraLight" panose="020B0609020000020004" pitchFamily="49" charset="0"/>
-              </a:rPr>
-              <a:t>a</a:t>
-            </a:r>
-            <a:r>
-              <a:rPr lang="en-US" sz="1600" dirty="0">
-                <a:latin typeface="Cascadia Code ExtraLight" panose="020B0609020000020004" pitchFamily="49" charset="0"/>
-                <a:ea typeface="Cascadia Code ExtraLight" panose="020B0609020000020004" pitchFamily="49" charset="0"/>
-                <a:cs typeface="Cascadia Code ExtraLight" panose="020B0609020000020004" pitchFamily="49" charset="0"/>
-              </a:rPr>
-              <a:t> </a:t>
-            </a:r>
-            <a:r>
-              <a:rPr lang="en-US" sz="1600" dirty="0" err="1">
-                <a:latin typeface="Cascadia Code ExtraLight" panose="020B0609020000020004" pitchFamily="49" charset="0"/>
-                <a:ea typeface="Cascadia Code ExtraLight" panose="020B0609020000020004" pitchFamily="49" charset="0"/>
-                <a:cs typeface="Cascadia Code ExtraLight" panose="020B0609020000020004" pitchFamily="49" charset="0"/>
-              </a:rPr>
-              <a:t>a</a:t>
-            </a:r>
-            <a:r>
-              <a:rPr lang="en-US" sz="1600" dirty="0">
-                <a:latin typeface="Cascadia Code ExtraLight" panose="020B0609020000020004" pitchFamily="49" charset="0"/>
-                <a:ea typeface="Cascadia Code ExtraLight" panose="020B0609020000020004" pitchFamily="49" charset="0"/>
-                <a:cs typeface="Cascadia Code ExtraLight" panose="020B0609020000020004" pitchFamily="49" charset="0"/>
-              </a:rPr>
-              <a:t>"</a:t>
-            </a:r>
-          </a:p>
-          <a:p>
-            <a:r>
-              <a:rPr lang="en-US" sz="1600" dirty="0">
-                <a:latin typeface="Cascadia Code ExtraLight" panose="020B0609020000020004" pitchFamily="49" charset="0"/>
-                <a:ea typeface="Cascadia Code ExtraLight" panose="020B0609020000020004" pitchFamily="49" charset="0"/>
-                <a:cs typeface="Cascadia Code ExtraLight" panose="020B0609020000020004" pitchFamily="49" charset="0"/>
-              </a:rPr>
-              <a:t>    "b </a:t>
-            </a:r>
-            <a:r>
-              <a:rPr lang="en-US" sz="1600" dirty="0" err="1">
-                <a:latin typeface="Cascadia Code ExtraLight" panose="020B0609020000020004" pitchFamily="49" charset="0"/>
-                <a:ea typeface="Cascadia Code ExtraLight" panose="020B0609020000020004" pitchFamily="49" charset="0"/>
-                <a:cs typeface="Cascadia Code ExtraLight" panose="020B0609020000020004" pitchFamily="49" charset="0"/>
-              </a:rPr>
-              <a:t>b</a:t>
-            </a:r>
-            <a:r>
-              <a:rPr lang="en-US" sz="1600" dirty="0">
-                <a:latin typeface="Cascadia Code ExtraLight" panose="020B0609020000020004" pitchFamily="49" charset="0"/>
-                <a:ea typeface="Cascadia Code ExtraLight" panose="020B0609020000020004" pitchFamily="49" charset="0"/>
-                <a:cs typeface="Cascadia Code ExtraLight" panose="020B0609020000020004" pitchFamily="49" charset="0"/>
-              </a:rPr>
-              <a:t> </a:t>
-            </a:r>
-            <a:r>
-              <a:rPr lang="en-US" sz="1600" dirty="0" err="1">
-                <a:latin typeface="Cascadia Code ExtraLight" panose="020B0609020000020004" pitchFamily="49" charset="0"/>
-                <a:ea typeface="Cascadia Code ExtraLight" panose="020B0609020000020004" pitchFamily="49" charset="0"/>
-                <a:cs typeface="Cascadia Code ExtraLight" panose="020B0609020000020004" pitchFamily="49" charset="0"/>
-              </a:rPr>
-              <a:t>b</a:t>
-            </a:r>
-            <a:r>
-              <a:rPr lang="en-US" sz="1600" dirty="0">
-                <a:latin typeface="Cascadia Code ExtraLight" panose="020B0609020000020004" pitchFamily="49" charset="0"/>
-                <a:ea typeface="Cascadia Code ExtraLight" panose="020B0609020000020004" pitchFamily="49" charset="0"/>
-                <a:cs typeface="Cascadia Code ExtraLight" panose="020B0609020000020004" pitchFamily="49" charset="0"/>
-              </a:rPr>
-              <a:t>"</a:t>
-            </a:r>
-          </a:p>
-          <a:p>
-            <a:r>
-              <a:rPr lang="en-US" sz="1600" dirty="0">
-                <a:latin typeface="Cascadia Code ExtraLight" panose="020B0609020000020004" pitchFamily="49" charset="0"/>
-                <a:ea typeface="Cascadia Code ExtraLight" panose="020B0609020000020004" pitchFamily="49" charset="0"/>
-                <a:cs typeface="Cascadia Code ExtraLight" panose="020B0609020000020004" pitchFamily="49" charset="0"/>
-              </a:rPr>
-              <a:t>    "c d </a:t>
-            </a:r>
-            <a:r>
-              <a:rPr lang="en-US" sz="1600" dirty="0" err="1">
-                <a:latin typeface="Cascadia Code ExtraLight" panose="020B0609020000020004" pitchFamily="49" charset="0"/>
-                <a:ea typeface="Cascadia Code ExtraLight" panose="020B0609020000020004" pitchFamily="49" charset="0"/>
-                <a:cs typeface="Cascadia Code ExtraLight" panose="020B0609020000020004" pitchFamily="49" charset="0"/>
-              </a:rPr>
-              <a:t>d</a:t>
-            </a:r>
-            <a:r>
-              <a:rPr lang="en-US" sz="1600" dirty="0">
-                <a:latin typeface="Cascadia Code ExtraLight" panose="020B0609020000020004" pitchFamily="49" charset="0"/>
-                <a:ea typeface="Cascadia Code ExtraLight" panose="020B0609020000020004" pitchFamily="49" charset="0"/>
-                <a:cs typeface="Cascadia Code ExtraLight" panose="020B0609020000020004" pitchFamily="49" charset="0"/>
-              </a:rPr>
-              <a:t>"</a:t>
-            </a:r>
-          </a:p>
-          <a:p>
-            <a:r>
-              <a:rPr lang="en-US" sz="1600" dirty="0">
-                <a:latin typeface="Cascadia Code ExtraLight" panose="020B0609020000020004" pitchFamily="49" charset="0"/>
-                <a:ea typeface="Cascadia Code ExtraLight" panose="020B0609020000020004" pitchFamily="49" charset="0"/>
-                <a:cs typeface="Cascadia Code ExtraLight" panose="020B0609020000020004" pitchFamily="49" charset="0"/>
-              </a:rPr>
-              <a:t>    "e f g" </a:t>
-            </a:r>
-          </a:p>
-          <a:p>
-            <a:r>
-              <a:rPr lang="en-US" sz="1600" dirty="0">
-                <a:latin typeface="Cascadia Code ExtraLight" panose="020B0609020000020004" pitchFamily="49" charset="0"/>
-                <a:ea typeface="Cascadia Code ExtraLight" panose="020B0609020000020004" pitchFamily="49" charset="0"/>
-                <a:cs typeface="Cascadia Code ExtraLight" panose="020B0609020000020004" pitchFamily="49" charset="0"/>
-              </a:rPr>
-              <a:t>    "h </a:t>
-            </a:r>
-            <a:r>
-              <a:rPr lang="en-US" sz="1600" dirty="0" err="1">
-                <a:latin typeface="Cascadia Code ExtraLight" panose="020B0609020000020004" pitchFamily="49" charset="0"/>
-                <a:ea typeface="Cascadia Code ExtraLight" panose="020B0609020000020004" pitchFamily="49" charset="0"/>
-                <a:cs typeface="Cascadia Code ExtraLight" panose="020B0609020000020004" pitchFamily="49" charset="0"/>
-              </a:rPr>
-              <a:t>h</a:t>
-            </a:r>
-            <a:r>
-              <a:rPr lang="en-US" sz="1600" dirty="0">
-                <a:latin typeface="Cascadia Code ExtraLight" panose="020B0609020000020004" pitchFamily="49" charset="0"/>
-                <a:ea typeface="Cascadia Code ExtraLight" panose="020B0609020000020004" pitchFamily="49" charset="0"/>
-                <a:cs typeface="Cascadia Code ExtraLight" panose="020B0609020000020004" pitchFamily="49" charset="0"/>
-              </a:rPr>
-              <a:t> </a:t>
-            </a:r>
-            <a:r>
-              <a:rPr lang="en-US" sz="1600" dirty="0" err="1">
-                <a:latin typeface="Cascadia Code ExtraLight" panose="020B0609020000020004" pitchFamily="49" charset="0"/>
-                <a:ea typeface="Cascadia Code ExtraLight" panose="020B0609020000020004" pitchFamily="49" charset="0"/>
-                <a:cs typeface="Cascadia Code ExtraLight" panose="020B0609020000020004" pitchFamily="49" charset="0"/>
-              </a:rPr>
-              <a:t>h</a:t>
-            </a:r>
-            <a:r>
-              <a:rPr lang="en-US" sz="1600" dirty="0">
-                <a:latin typeface="Cascadia Code ExtraLight" panose="020B0609020000020004" pitchFamily="49" charset="0"/>
-                <a:ea typeface="Cascadia Code ExtraLight" panose="020B0609020000020004" pitchFamily="49" charset="0"/>
-                <a:cs typeface="Cascadia Code ExtraLight" panose="020B0609020000020004" pitchFamily="49" charset="0"/>
-              </a:rPr>
-              <a:t>"</a:t>
-            </a:r>
-          </a:p>
-          <a:p>
-            <a:r>
-              <a:rPr lang="en-US" sz="1600" dirty="0">
-                <a:latin typeface="Cascadia Code ExtraLight" panose="020B0609020000020004" pitchFamily="49" charset="0"/>
-                <a:ea typeface="Cascadia Code ExtraLight" panose="020B0609020000020004" pitchFamily="49" charset="0"/>
-                <a:cs typeface="Cascadia Code ExtraLight" panose="020B0609020000020004" pitchFamily="49" charset="0"/>
-              </a:rPr>
-              <a:t>    "</a:t>
-            </a:r>
-            <a:r>
-              <a:rPr lang="en-US" sz="1600" dirty="0" err="1">
-                <a:latin typeface="Cascadia Code ExtraLight" panose="020B0609020000020004" pitchFamily="49" charset="0"/>
-                <a:ea typeface="Cascadia Code ExtraLight" panose="020B0609020000020004" pitchFamily="49" charset="0"/>
-                <a:cs typeface="Cascadia Code ExtraLight" panose="020B0609020000020004" pitchFamily="49" charset="0"/>
-              </a:rPr>
-              <a:t>i</a:t>
-            </a:r>
-            <a:r>
-              <a:rPr lang="en-US" sz="1600" dirty="0">
-                <a:latin typeface="Cascadia Code ExtraLight" panose="020B0609020000020004" pitchFamily="49" charset="0"/>
-                <a:ea typeface="Cascadia Code ExtraLight" panose="020B0609020000020004" pitchFamily="49" charset="0"/>
-                <a:cs typeface="Cascadia Code ExtraLight" panose="020B0609020000020004" pitchFamily="49" charset="0"/>
-              </a:rPr>
-              <a:t> </a:t>
-            </a:r>
-            <a:r>
-              <a:rPr lang="en-US" sz="1600" dirty="0" err="1">
-                <a:latin typeface="Cascadia Code ExtraLight" panose="020B0609020000020004" pitchFamily="49" charset="0"/>
-                <a:ea typeface="Cascadia Code ExtraLight" panose="020B0609020000020004" pitchFamily="49" charset="0"/>
-                <a:cs typeface="Cascadia Code ExtraLight" panose="020B0609020000020004" pitchFamily="49" charset="0"/>
-              </a:rPr>
-              <a:t>i</a:t>
-            </a:r>
-            <a:r>
-              <a:rPr lang="en-US" sz="1600" dirty="0">
-                <a:latin typeface="Cascadia Code ExtraLight" panose="020B0609020000020004" pitchFamily="49" charset="0"/>
-                <a:ea typeface="Cascadia Code ExtraLight" panose="020B0609020000020004" pitchFamily="49" charset="0"/>
-                <a:cs typeface="Cascadia Code ExtraLight" panose="020B0609020000020004" pitchFamily="49" charset="0"/>
-              </a:rPr>
-              <a:t> </a:t>
-            </a:r>
-            <a:r>
-              <a:rPr lang="en-US" sz="1600" dirty="0" err="1">
-                <a:latin typeface="Cascadia Code ExtraLight" panose="020B0609020000020004" pitchFamily="49" charset="0"/>
-                <a:ea typeface="Cascadia Code ExtraLight" panose="020B0609020000020004" pitchFamily="49" charset="0"/>
-                <a:cs typeface="Cascadia Code ExtraLight" panose="020B0609020000020004" pitchFamily="49" charset="0"/>
-              </a:rPr>
-              <a:t>i</a:t>
-            </a:r>
-            <a:r>
-              <a:rPr lang="en-US" sz="1600" dirty="0">
-                <a:latin typeface="Cascadia Code ExtraLight" panose="020B0609020000020004" pitchFamily="49" charset="0"/>
-                <a:ea typeface="Cascadia Code ExtraLight" panose="020B0609020000020004" pitchFamily="49" charset="0"/>
-                <a:cs typeface="Cascadia Code ExtraLight" panose="020B0609020000020004" pitchFamily="49" charset="0"/>
-              </a:rPr>
-              <a:t>"</a:t>
-            </a:r>
-          </a:p>
-          <a:p>
-            <a:r>
-              <a:rPr lang="en-US" sz="1600" dirty="0">
-                <a:latin typeface="Cascadia Code ExtraLight" panose="020B0609020000020004" pitchFamily="49" charset="0"/>
-                <a:ea typeface="Cascadia Code ExtraLight" panose="020B0609020000020004" pitchFamily="49" charset="0"/>
-                <a:cs typeface="Cascadia Code ExtraLight" panose="020B0609020000020004" pitchFamily="49" charset="0"/>
-              </a:rPr>
-              <a:t>    "j k </a:t>
-            </a:r>
-            <a:r>
-              <a:rPr lang="en-US" sz="1600" dirty="0" err="1">
-                <a:latin typeface="Cascadia Code ExtraLight" panose="020B0609020000020004" pitchFamily="49" charset="0"/>
-                <a:ea typeface="Cascadia Code ExtraLight" panose="020B0609020000020004" pitchFamily="49" charset="0"/>
-                <a:cs typeface="Cascadia Code ExtraLight" panose="020B0609020000020004" pitchFamily="49" charset="0"/>
-              </a:rPr>
-              <a:t>k</a:t>
-            </a:r>
-            <a:r>
-              <a:rPr lang="en-US" sz="1600" dirty="0">
-                <a:latin typeface="Cascadia Code ExtraLight" panose="020B0609020000020004" pitchFamily="49" charset="0"/>
-                <a:ea typeface="Cascadia Code ExtraLight" panose="020B0609020000020004" pitchFamily="49" charset="0"/>
-                <a:cs typeface="Cascadia Code ExtraLight" panose="020B0609020000020004" pitchFamily="49" charset="0"/>
-              </a:rPr>
-              <a:t>"</a:t>
-            </a:r>
-          </a:p>
-          <a:p>
-            <a:r>
-              <a:rPr lang="en-US" sz="1600" dirty="0">
-                <a:latin typeface="Cascadia Code ExtraLight" panose="020B0609020000020004" pitchFamily="49" charset="0"/>
-                <a:ea typeface="Cascadia Code ExtraLight" panose="020B0609020000020004" pitchFamily="49" charset="0"/>
-                <a:cs typeface="Cascadia Code ExtraLight" panose="020B0609020000020004" pitchFamily="49" charset="0"/>
-              </a:rPr>
-              <a:t>    "m o </a:t>
-            </a:r>
-            <a:r>
-              <a:rPr lang="en-US" sz="1600" dirty="0" err="1">
-                <a:latin typeface="Cascadia Code ExtraLight" panose="020B0609020000020004" pitchFamily="49" charset="0"/>
-                <a:ea typeface="Cascadia Code ExtraLight" panose="020B0609020000020004" pitchFamily="49" charset="0"/>
-                <a:cs typeface="Cascadia Code ExtraLight" panose="020B0609020000020004" pitchFamily="49" charset="0"/>
-              </a:rPr>
-              <a:t>o</a:t>
-            </a:r>
-            <a:r>
-              <a:rPr lang="en-US" sz="1600" dirty="0">
-                <a:latin typeface="Cascadia Code ExtraLight" panose="020B0609020000020004" pitchFamily="49" charset="0"/>
-                <a:ea typeface="Cascadia Code ExtraLight" panose="020B0609020000020004" pitchFamily="49" charset="0"/>
-                <a:cs typeface="Cascadia Code ExtraLight" panose="020B0609020000020004" pitchFamily="49" charset="0"/>
-              </a:rPr>
-              <a:t>"</a:t>
-            </a:r>
-          </a:p>
-          <a:p>
-            <a:r>
-              <a:rPr lang="en-US" sz="1600" dirty="0">
-                <a:latin typeface="Cascadia Code ExtraLight" panose="020B0609020000020004" pitchFamily="49" charset="0"/>
-                <a:ea typeface="Cascadia Code ExtraLight" panose="020B0609020000020004" pitchFamily="49" charset="0"/>
-                <a:cs typeface="Cascadia Code ExtraLight" panose="020B0609020000020004" pitchFamily="49" charset="0"/>
-              </a:rPr>
-              <a:t>    "n o </a:t>
-            </a:r>
-            <a:r>
-              <a:rPr lang="en-US" sz="1600" dirty="0" err="1">
-                <a:latin typeface="Cascadia Code ExtraLight" panose="020B0609020000020004" pitchFamily="49" charset="0"/>
-                <a:ea typeface="Cascadia Code ExtraLight" panose="020B0609020000020004" pitchFamily="49" charset="0"/>
-                <a:cs typeface="Cascadia Code ExtraLight" panose="020B0609020000020004" pitchFamily="49" charset="0"/>
-              </a:rPr>
-              <a:t>o</a:t>
-            </a:r>
-            <a:r>
-              <a:rPr lang="en-US" sz="1600" dirty="0">
-                <a:latin typeface="Cascadia Code ExtraLight" panose="020B0609020000020004" pitchFamily="49" charset="0"/>
-                <a:ea typeface="Cascadia Code ExtraLight" panose="020B0609020000020004" pitchFamily="49" charset="0"/>
-                <a:cs typeface="Cascadia Code ExtraLight" panose="020B0609020000020004" pitchFamily="49" charset="0"/>
-              </a:rPr>
-              <a:t>"</a:t>
-            </a:r>
-          </a:p>
-          <a:p>
-            <a:r>
-              <a:rPr lang="en-US" sz="1600" dirty="0">
-                <a:latin typeface="Cascadia Code ExtraLight" panose="020B0609020000020004" pitchFamily="49" charset="0"/>
-                <a:ea typeface="Cascadia Code ExtraLight" panose="020B0609020000020004" pitchFamily="49" charset="0"/>
-                <a:cs typeface="Cascadia Code ExtraLight" panose="020B0609020000020004" pitchFamily="49" charset="0"/>
-              </a:rPr>
-              <a:t>    "p </a:t>
-            </a:r>
-            <a:r>
-              <a:rPr lang="en-US" sz="1600" dirty="0" err="1">
-                <a:latin typeface="Cascadia Code ExtraLight" panose="020B0609020000020004" pitchFamily="49" charset="0"/>
-                <a:ea typeface="Cascadia Code ExtraLight" panose="020B0609020000020004" pitchFamily="49" charset="0"/>
-                <a:cs typeface="Cascadia Code ExtraLight" panose="020B0609020000020004" pitchFamily="49" charset="0"/>
-              </a:rPr>
-              <a:t>p</a:t>
-            </a:r>
-            <a:r>
-              <a:rPr lang="en-US" sz="1600" dirty="0">
-                <a:latin typeface="Cascadia Code ExtraLight" panose="020B0609020000020004" pitchFamily="49" charset="0"/>
-                <a:ea typeface="Cascadia Code ExtraLight" panose="020B0609020000020004" pitchFamily="49" charset="0"/>
-                <a:cs typeface="Cascadia Code ExtraLight" panose="020B0609020000020004" pitchFamily="49" charset="0"/>
-              </a:rPr>
-              <a:t> </a:t>
-            </a:r>
-            <a:r>
-              <a:rPr lang="en-US" sz="1600" dirty="0" err="1">
-                <a:latin typeface="Cascadia Code ExtraLight" panose="020B0609020000020004" pitchFamily="49" charset="0"/>
-                <a:ea typeface="Cascadia Code ExtraLight" panose="020B0609020000020004" pitchFamily="49" charset="0"/>
-                <a:cs typeface="Cascadia Code ExtraLight" panose="020B0609020000020004" pitchFamily="49" charset="0"/>
-              </a:rPr>
-              <a:t>p</a:t>
-            </a:r>
-            <a:r>
-              <a:rPr lang="en-US" sz="1600" dirty="0">
-                <a:latin typeface="Cascadia Code ExtraLight" panose="020B0609020000020004" pitchFamily="49" charset="0"/>
-                <a:ea typeface="Cascadia Code ExtraLight" panose="020B0609020000020004" pitchFamily="49" charset="0"/>
-                <a:cs typeface="Cascadia Code ExtraLight" panose="020B0609020000020004" pitchFamily="49" charset="0"/>
-              </a:rPr>
-              <a:t>";</a:t>
-            </a:r>
-          </a:p>
-          <a:p>
-            <a:r>
-              <a:rPr lang="en-US" sz="1600" dirty="0">
-                <a:latin typeface="Cascadia Code ExtraLight" panose="020B0609020000020004" pitchFamily="49" charset="0"/>
-                <a:ea typeface="Cascadia Code ExtraLight" panose="020B0609020000020004" pitchFamily="49" charset="0"/>
-                <a:cs typeface="Cascadia Code ExtraLight" panose="020B0609020000020004" pitchFamily="49" charset="0"/>
-              </a:rPr>
-              <a:t>}</a:t>
-            </a:r>
-          </a:p>
-        </p:txBody>
-      </p:sp>
-      <p:sp>
-        <p:nvSpPr>
-          <p:cNvPr id="5" name="TextBox 4">
-            <a:extLst>
-              <a:ext uri="{FF2B5EF4-FFF2-40B4-BE49-F238E27FC236}">
-                <a16:creationId xmlns:a16="http://schemas.microsoft.com/office/drawing/2014/main" id="{0045AB68-41CB-9FE6-8749-2F9A2205B10F}"/>
-              </a:ext>
-            </a:extLst>
-          </p:cNvPr>
-          <p:cNvSpPr txBox="1"/>
-          <p:nvPr/>
-        </p:nvSpPr>
-        <p:spPr>
-          <a:xfrm>
-            <a:off x="7022991" y="1845449"/>
-            <a:ext cx="3711271" cy="3785652"/>
-          </a:xfrm>
-          <a:prstGeom prst="rect">
-            <a:avLst/>
-          </a:prstGeom>
-          <a:noFill/>
-        </p:spPr>
-        <p:txBody>
-          <a:bodyPr wrap="square">
-            <a:spAutoFit/>
-          </a:bodyPr>
-          <a:lstStyle/>
-          <a:p>
-            <a:endParaRPr lang="en-US" sz="1600" dirty="0">
-              <a:latin typeface="Cascadia Code ExtraLight" panose="020B0609020000020004" pitchFamily="49" charset="0"/>
-              <a:ea typeface="Cascadia Code ExtraLight" panose="020B0609020000020004" pitchFamily="49" charset="0"/>
-              <a:cs typeface="Cascadia Code ExtraLight" panose="020B0609020000020004" pitchFamily="49" charset="0"/>
-            </a:endParaRPr>
-          </a:p>
-          <a:p>
-            <a:r>
-              <a:rPr lang="en-US" sz="1600" dirty="0">
-                <a:latin typeface="Cascadia Code ExtraLight" panose="020B0609020000020004" pitchFamily="49" charset="0"/>
-                <a:ea typeface="Cascadia Code ExtraLight" panose="020B0609020000020004" pitchFamily="49" charset="0"/>
-                <a:cs typeface="Cascadia Code ExtraLight" panose="020B0609020000020004" pitchFamily="49" charset="0"/>
-              </a:rPr>
-              <a:t>.div1 { </a:t>
-            </a:r>
-          </a:p>
-          <a:p>
-            <a:r>
-              <a:rPr lang="en-US" sz="1600" dirty="0">
-                <a:latin typeface="Cascadia Code ExtraLight" panose="020B0609020000020004" pitchFamily="49" charset="0"/>
-                <a:ea typeface="Cascadia Code ExtraLight" panose="020B0609020000020004" pitchFamily="49" charset="0"/>
-                <a:cs typeface="Cascadia Code ExtraLight" panose="020B0609020000020004" pitchFamily="49" charset="0"/>
-              </a:rPr>
-              <a:t>  grid-area: a;</a:t>
-            </a:r>
-          </a:p>
-          <a:p>
-            <a:r>
-              <a:rPr lang="en-US" sz="1600" dirty="0">
-                <a:latin typeface="Cascadia Code ExtraLight" panose="020B0609020000020004" pitchFamily="49" charset="0"/>
-                <a:ea typeface="Cascadia Code ExtraLight" panose="020B0609020000020004" pitchFamily="49" charset="0"/>
-                <a:cs typeface="Cascadia Code ExtraLight" panose="020B0609020000020004" pitchFamily="49" charset="0"/>
-              </a:rPr>
-              <a:t>  padding-bottom: 15px;</a:t>
-            </a:r>
-          </a:p>
-          <a:p>
-            <a:r>
-              <a:rPr lang="en-US" sz="1600" dirty="0">
-                <a:latin typeface="Cascadia Code ExtraLight" panose="020B0609020000020004" pitchFamily="49" charset="0"/>
-                <a:ea typeface="Cascadia Code ExtraLight" panose="020B0609020000020004" pitchFamily="49" charset="0"/>
-                <a:cs typeface="Cascadia Code ExtraLight" panose="020B0609020000020004" pitchFamily="49" charset="0"/>
-              </a:rPr>
-              <a:t>}</a:t>
-            </a:r>
-          </a:p>
-          <a:p>
-            <a:endParaRPr lang="en-US" sz="1600" dirty="0">
-              <a:latin typeface="Cascadia Code ExtraLight" panose="020B0609020000020004" pitchFamily="49" charset="0"/>
-              <a:ea typeface="Cascadia Code ExtraLight" panose="020B0609020000020004" pitchFamily="49" charset="0"/>
-              <a:cs typeface="Cascadia Code ExtraLight" panose="020B0609020000020004" pitchFamily="49" charset="0"/>
-            </a:endParaRPr>
-          </a:p>
-          <a:p>
-            <a:r>
-              <a:rPr lang="en-US" sz="1600" dirty="0">
-                <a:latin typeface="Cascadia Code ExtraLight" panose="020B0609020000020004" pitchFamily="49" charset="0"/>
-                <a:ea typeface="Cascadia Code ExtraLight" panose="020B0609020000020004" pitchFamily="49" charset="0"/>
-                <a:cs typeface="Cascadia Code ExtraLight" panose="020B0609020000020004" pitchFamily="49" charset="0"/>
-              </a:rPr>
-              <a:t>.div2 { </a:t>
-            </a:r>
-          </a:p>
-          <a:p>
-            <a:r>
-              <a:rPr lang="en-US" sz="1600" dirty="0">
-                <a:latin typeface="Cascadia Code ExtraLight" panose="020B0609020000020004" pitchFamily="49" charset="0"/>
-                <a:ea typeface="Cascadia Code ExtraLight" panose="020B0609020000020004" pitchFamily="49" charset="0"/>
-                <a:cs typeface="Cascadia Code ExtraLight" panose="020B0609020000020004" pitchFamily="49" charset="0"/>
-              </a:rPr>
-              <a:t>    grid-area: b;</a:t>
-            </a:r>
-          </a:p>
-          <a:p>
-            <a:r>
-              <a:rPr lang="en-US" sz="1600" dirty="0">
-                <a:latin typeface="Cascadia Code ExtraLight" panose="020B0609020000020004" pitchFamily="49" charset="0"/>
-                <a:ea typeface="Cascadia Code ExtraLight" panose="020B0609020000020004" pitchFamily="49" charset="0"/>
-                <a:cs typeface="Cascadia Code ExtraLight" panose="020B0609020000020004" pitchFamily="49" charset="0"/>
-              </a:rPr>
-              <a:t>    padding-left: 30px;</a:t>
-            </a:r>
-          </a:p>
-          <a:p>
-            <a:r>
-              <a:rPr lang="en-US" sz="1600" dirty="0">
-                <a:latin typeface="Cascadia Code ExtraLight" panose="020B0609020000020004" pitchFamily="49" charset="0"/>
-                <a:ea typeface="Cascadia Code ExtraLight" panose="020B0609020000020004" pitchFamily="49" charset="0"/>
-                <a:cs typeface="Cascadia Code ExtraLight" panose="020B0609020000020004" pitchFamily="49" charset="0"/>
-              </a:rPr>
-              <a:t>}</a:t>
-            </a:r>
-          </a:p>
-          <a:p>
-            <a:endParaRPr lang="en-US" sz="1600" dirty="0">
-              <a:latin typeface="Cascadia Code ExtraLight" panose="020B0609020000020004" pitchFamily="49" charset="0"/>
-              <a:ea typeface="Cascadia Code ExtraLight" panose="020B0609020000020004" pitchFamily="49" charset="0"/>
-              <a:cs typeface="Cascadia Code ExtraLight" panose="020B0609020000020004" pitchFamily="49" charset="0"/>
-            </a:endParaRPr>
-          </a:p>
-          <a:p>
-            <a:r>
-              <a:rPr lang="en-US" sz="1600" dirty="0">
-                <a:latin typeface="Cascadia Code ExtraLight" panose="020B0609020000020004" pitchFamily="49" charset="0"/>
-                <a:ea typeface="Cascadia Code ExtraLight" panose="020B0609020000020004" pitchFamily="49" charset="0"/>
-                <a:cs typeface="Cascadia Code ExtraLight" panose="020B0609020000020004" pitchFamily="49" charset="0"/>
-              </a:rPr>
-              <a:t>.div3 { </a:t>
-            </a:r>
-          </a:p>
-          <a:p>
-            <a:r>
-              <a:rPr lang="en-US" sz="1600" dirty="0">
-                <a:latin typeface="Cascadia Code ExtraLight" panose="020B0609020000020004" pitchFamily="49" charset="0"/>
-                <a:ea typeface="Cascadia Code ExtraLight" panose="020B0609020000020004" pitchFamily="49" charset="0"/>
-                <a:cs typeface="Cascadia Code ExtraLight" panose="020B0609020000020004" pitchFamily="49" charset="0"/>
-              </a:rPr>
-              <a:t>    grid-area: c;</a:t>
-            </a:r>
-          </a:p>
-          <a:p>
-            <a:r>
-              <a:rPr lang="en-US" sz="1600" dirty="0">
-                <a:latin typeface="Cascadia Code ExtraLight" panose="020B0609020000020004" pitchFamily="49" charset="0"/>
-                <a:ea typeface="Cascadia Code ExtraLight" panose="020B0609020000020004" pitchFamily="49" charset="0"/>
-                <a:cs typeface="Cascadia Code ExtraLight" panose="020B0609020000020004" pitchFamily="49" charset="0"/>
-              </a:rPr>
-              <a:t>    padding-left: 30px;</a:t>
-            </a:r>
-          </a:p>
-          <a:p>
-            <a:r>
-              <a:rPr lang="en-US" sz="1600" dirty="0">
-                <a:latin typeface="Cascadia Code ExtraLight" panose="020B0609020000020004" pitchFamily="49" charset="0"/>
-                <a:ea typeface="Cascadia Code ExtraLight" panose="020B0609020000020004" pitchFamily="49" charset="0"/>
-                <a:cs typeface="Cascadia Code ExtraLight" panose="020B0609020000020004" pitchFamily="49" charset="0"/>
-              </a:rPr>
-              <a:t>}</a:t>
-            </a:r>
-            <a:endParaRPr lang="en-US" sz="1600" dirty="0"/>
-          </a:p>
-        </p:txBody>
-      </p:sp>
+              </a:endParaRPr>
+            </a:p>
+            <a:p>
+              <a:r>
+                <a:rPr lang="en-US" sz="1600" dirty="0">
+                  <a:latin typeface="Cascadia Code ExtraLight" panose="020B0609020000020004" pitchFamily="49" charset="0"/>
+                  <a:ea typeface="Cascadia Code ExtraLight" panose="020B0609020000020004" pitchFamily="49" charset="0"/>
+                  <a:cs typeface="Cascadia Code ExtraLight" panose="020B0609020000020004" pitchFamily="49" charset="0"/>
+                </a:rPr>
+                <a:t>.div3 { </a:t>
+              </a:r>
+            </a:p>
+            <a:p>
+              <a:r>
+                <a:rPr lang="en-US" sz="1600" dirty="0">
+                  <a:latin typeface="Cascadia Code ExtraLight" panose="020B0609020000020004" pitchFamily="49" charset="0"/>
+                  <a:ea typeface="Cascadia Code ExtraLight" panose="020B0609020000020004" pitchFamily="49" charset="0"/>
+                  <a:cs typeface="Cascadia Code ExtraLight" panose="020B0609020000020004" pitchFamily="49" charset="0"/>
+                </a:rPr>
+                <a:t>    grid-area: c;</a:t>
+              </a:r>
+            </a:p>
+            <a:p>
+              <a:r>
+                <a:rPr lang="en-US" sz="1600" dirty="0">
+                  <a:latin typeface="Cascadia Code ExtraLight" panose="020B0609020000020004" pitchFamily="49" charset="0"/>
+                  <a:ea typeface="Cascadia Code ExtraLight" panose="020B0609020000020004" pitchFamily="49" charset="0"/>
+                  <a:cs typeface="Cascadia Code ExtraLight" panose="020B0609020000020004" pitchFamily="49" charset="0"/>
+                </a:rPr>
+                <a:t>    padding-left: 30px;</a:t>
+              </a:r>
+            </a:p>
+            <a:p>
+              <a:r>
+                <a:rPr lang="en-US" sz="1600" dirty="0">
+                  <a:latin typeface="Cascadia Code ExtraLight" panose="020B0609020000020004" pitchFamily="49" charset="0"/>
+                  <a:ea typeface="Cascadia Code ExtraLight" panose="020B0609020000020004" pitchFamily="49" charset="0"/>
+                  <a:cs typeface="Cascadia Code ExtraLight" panose="020B0609020000020004" pitchFamily="49" charset="0"/>
+                </a:rPr>
+                <a:t>}</a:t>
+              </a:r>
+              <a:endParaRPr lang="en-US" sz="1600" dirty="0"/>
+            </a:p>
+          </p:txBody>
+        </p:sp>
+      </p:grpSp>
       <p:sp>
         <p:nvSpPr>
           <p:cNvPr id="6" name="Title 5">
